--- a/(3.19) 소재 및 라이브러리.pptx
+++ b/(3.19) 소재 및 라이브러리.pptx
@@ -19,10 +19,12 @@
     <p:sldId id="270" r:id="rId13"/>
     <p:sldId id="271" r:id="rId14"/>
     <p:sldId id="273" r:id="rId15"/>
-    <p:sldId id="274" r:id="rId16"/>
-    <p:sldId id="275" r:id="rId17"/>
-    <p:sldId id="272" r:id="rId18"/>
-    <p:sldId id="257" r:id="rId19"/>
+    <p:sldId id="276" r:id="rId16"/>
+    <p:sldId id="274" r:id="rId17"/>
+    <p:sldId id="275" r:id="rId18"/>
+    <p:sldId id="277" r:id="rId19"/>
+    <p:sldId id="272" r:id="rId20"/>
+    <p:sldId id="257" r:id="rId21"/>
   </p:sldIdLst>
   <p:sldSz cx="12192000" cy="6858000"/>
   <p:notesSz cx="6858000" cy="9144000"/>
@@ -171,10 +173,9 @@
           </a:lstStyle>
           <a:p>
             <a:r>
-              <a:rPr lang="ko-KR" altLang="en-US" smtClean="0"/>
+              <a:rPr lang="ko-KR" altLang="en-US"/>
               <a:t>마스터 제목 스타일 편집</a:t>
             </a:r>
-            <a:endParaRPr lang="ko-KR" altLang="en-US"/>
           </a:p>
         </p:txBody>
       </p:sp>
@@ -236,10 +237,9 @@
           </a:lstStyle>
           <a:p>
             <a:r>
-              <a:rPr lang="ko-KR" altLang="en-US" smtClean="0"/>
+              <a:rPr lang="ko-KR" altLang="en-US"/>
               <a:t>클릭하여 마스터 부제목 스타일 편집</a:t>
             </a:r>
-            <a:endParaRPr lang="ko-KR" altLang="en-US"/>
           </a:p>
         </p:txBody>
       </p:sp>
@@ -260,7 +260,7 @@
           <a:p>
             <a:fld id="{7ACD0341-1F12-4E49-993C-A6806D227CEE}" type="datetimeFigureOut">
               <a:rPr lang="ko-KR" altLang="en-US" smtClean="0"/>
-              <a:t>2026-03-19</a:t>
+              <a:t>2026-03-20</a:t>
             </a:fld>
             <a:endParaRPr lang="ko-KR" altLang="en-US"/>
           </a:p>
@@ -354,10 +354,9 @@
           <a:lstStyle/>
           <a:p>
             <a:r>
-              <a:rPr lang="ko-KR" altLang="en-US" smtClean="0"/>
+              <a:rPr lang="ko-KR" altLang="en-US"/>
               <a:t>마스터 제목 스타일 편집</a:t>
             </a:r>
-            <a:endParaRPr lang="ko-KR" altLang="en-US"/>
           </a:p>
         </p:txBody>
       </p:sp>
@@ -378,38 +377,37 @@
           <a:p>
             <a:pPr lvl="0"/>
             <a:r>
-              <a:rPr lang="ko-KR" altLang="en-US" smtClean="0"/>
+              <a:rPr lang="ko-KR" altLang="en-US"/>
               <a:t>마스터 텍스트 스타일 편집</a:t>
             </a:r>
           </a:p>
           <a:p>
             <a:pPr lvl="1"/>
             <a:r>
-              <a:rPr lang="ko-KR" altLang="en-US" smtClean="0"/>
+              <a:rPr lang="ko-KR" altLang="en-US"/>
               <a:t>둘째 수준</a:t>
             </a:r>
           </a:p>
           <a:p>
             <a:pPr lvl="2"/>
             <a:r>
-              <a:rPr lang="ko-KR" altLang="en-US" smtClean="0"/>
+              <a:rPr lang="ko-KR" altLang="en-US"/>
               <a:t>셋째 수준</a:t>
             </a:r>
           </a:p>
           <a:p>
             <a:pPr lvl="3"/>
             <a:r>
-              <a:rPr lang="ko-KR" altLang="en-US" smtClean="0"/>
+              <a:rPr lang="ko-KR" altLang="en-US"/>
               <a:t>넷째 수준</a:t>
             </a:r>
           </a:p>
           <a:p>
             <a:pPr lvl="4"/>
             <a:r>
-              <a:rPr lang="ko-KR" altLang="en-US" smtClean="0"/>
+              <a:rPr lang="ko-KR" altLang="en-US"/>
               <a:t>다섯째 수준</a:t>
             </a:r>
-            <a:endParaRPr lang="ko-KR" altLang="en-US"/>
           </a:p>
         </p:txBody>
       </p:sp>
@@ -430,7 +428,7 @@
           <a:p>
             <a:fld id="{7ACD0341-1F12-4E49-993C-A6806D227CEE}" type="datetimeFigureOut">
               <a:rPr lang="ko-KR" altLang="en-US" smtClean="0"/>
-              <a:t>2026-03-19</a:t>
+              <a:t>2026-03-20</a:t>
             </a:fld>
             <a:endParaRPr lang="ko-KR" altLang="en-US"/>
           </a:p>
@@ -529,10 +527,9 @@
           <a:lstStyle/>
           <a:p>
             <a:r>
-              <a:rPr lang="ko-KR" altLang="en-US" smtClean="0"/>
+              <a:rPr lang="ko-KR" altLang="en-US"/>
               <a:t>마스터 제목 스타일 편집</a:t>
             </a:r>
-            <a:endParaRPr lang="ko-KR" altLang="en-US"/>
           </a:p>
         </p:txBody>
       </p:sp>
@@ -558,38 +555,37 @@
           <a:p>
             <a:pPr lvl="0"/>
             <a:r>
-              <a:rPr lang="ko-KR" altLang="en-US" smtClean="0"/>
+              <a:rPr lang="ko-KR" altLang="en-US"/>
               <a:t>마스터 텍스트 스타일 편집</a:t>
             </a:r>
           </a:p>
           <a:p>
             <a:pPr lvl="1"/>
             <a:r>
-              <a:rPr lang="ko-KR" altLang="en-US" smtClean="0"/>
+              <a:rPr lang="ko-KR" altLang="en-US"/>
               <a:t>둘째 수준</a:t>
             </a:r>
           </a:p>
           <a:p>
             <a:pPr lvl="2"/>
             <a:r>
-              <a:rPr lang="ko-KR" altLang="en-US" smtClean="0"/>
+              <a:rPr lang="ko-KR" altLang="en-US"/>
               <a:t>셋째 수준</a:t>
             </a:r>
           </a:p>
           <a:p>
             <a:pPr lvl="3"/>
             <a:r>
-              <a:rPr lang="ko-KR" altLang="en-US" smtClean="0"/>
+              <a:rPr lang="ko-KR" altLang="en-US"/>
               <a:t>넷째 수준</a:t>
             </a:r>
           </a:p>
           <a:p>
             <a:pPr lvl="4"/>
             <a:r>
-              <a:rPr lang="ko-KR" altLang="en-US" smtClean="0"/>
+              <a:rPr lang="ko-KR" altLang="en-US"/>
               <a:t>다섯째 수준</a:t>
             </a:r>
-            <a:endParaRPr lang="ko-KR" altLang="en-US"/>
           </a:p>
         </p:txBody>
       </p:sp>
@@ -610,7 +606,7 @@
           <a:p>
             <a:fld id="{7ACD0341-1F12-4E49-993C-A6806D227CEE}" type="datetimeFigureOut">
               <a:rPr lang="ko-KR" altLang="en-US" smtClean="0"/>
-              <a:t>2026-03-19</a:t>
+              <a:t>2026-03-20</a:t>
             </a:fld>
             <a:endParaRPr lang="ko-KR" altLang="en-US"/>
           </a:p>
@@ -704,10 +700,9 @@
           <a:lstStyle/>
           <a:p>
             <a:r>
-              <a:rPr lang="ko-KR" altLang="en-US" smtClean="0"/>
+              <a:rPr lang="ko-KR" altLang="en-US"/>
               <a:t>마스터 제목 스타일 편집</a:t>
             </a:r>
-            <a:endParaRPr lang="ko-KR" altLang="en-US"/>
           </a:p>
         </p:txBody>
       </p:sp>
@@ -728,38 +723,37 @@
           <a:p>
             <a:pPr lvl="0"/>
             <a:r>
-              <a:rPr lang="ko-KR" altLang="en-US" smtClean="0"/>
+              <a:rPr lang="ko-KR" altLang="en-US"/>
               <a:t>마스터 텍스트 스타일 편집</a:t>
             </a:r>
           </a:p>
           <a:p>
             <a:pPr lvl="1"/>
             <a:r>
-              <a:rPr lang="ko-KR" altLang="en-US" smtClean="0"/>
+              <a:rPr lang="ko-KR" altLang="en-US"/>
               <a:t>둘째 수준</a:t>
             </a:r>
           </a:p>
           <a:p>
             <a:pPr lvl="2"/>
             <a:r>
-              <a:rPr lang="ko-KR" altLang="en-US" smtClean="0"/>
+              <a:rPr lang="ko-KR" altLang="en-US"/>
               <a:t>셋째 수준</a:t>
             </a:r>
           </a:p>
           <a:p>
             <a:pPr lvl="3"/>
             <a:r>
-              <a:rPr lang="ko-KR" altLang="en-US" smtClean="0"/>
+              <a:rPr lang="ko-KR" altLang="en-US"/>
               <a:t>넷째 수준</a:t>
             </a:r>
           </a:p>
           <a:p>
             <a:pPr lvl="4"/>
             <a:r>
-              <a:rPr lang="ko-KR" altLang="en-US" smtClean="0"/>
+              <a:rPr lang="ko-KR" altLang="en-US"/>
               <a:t>다섯째 수준</a:t>
             </a:r>
-            <a:endParaRPr lang="ko-KR" altLang="en-US"/>
           </a:p>
         </p:txBody>
       </p:sp>
@@ -780,7 +774,7 @@
           <a:p>
             <a:fld id="{7ACD0341-1F12-4E49-993C-A6806D227CEE}" type="datetimeFigureOut">
               <a:rPr lang="ko-KR" altLang="en-US" smtClean="0"/>
-              <a:t>2026-03-19</a:t>
+              <a:t>2026-03-20</a:t>
             </a:fld>
             <a:endParaRPr lang="ko-KR" altLang="en-US"/>
           </a:p>
@@ -883,10 +877,9 @@
           </a:lstStyle>
           <a:p>
             <a:r>
-              <a:rPr lang="ko-KR" altLang="en-US" smtClean="0"/>
+              <a:rPr lang="ko-KR" altLang="en-US"/>
               <a:t>마스터 제목 스타일 편집</a:t>
             </a:r>
-            <a:endParaRPr lang="ko-KR" altLang="en-US"/>
           </a:p>
         </p:txBody>
       </p:sp>
@@ -1003,7 +996,7 @@
           <a:p>
             <a:pPr lvl="0"/>
             <a:r>
-              <a:rPr lang="ko-KR" altLang="en-US" smtClean="0"/>
+              <a:rPr lang="ko-KR" altLang="en-US"/>
               <a:t>마스터 텍스트 스타일 편집</a:t>
             </a:r>
           </a:p>
@@ -1026,7 +1019,7 @@
           <a:p>
             <a:fld id="{7ACD0341-1F12-4E49-993C-A6806D227CEE}" type="datetimeFigureOut">
               <a:rPr lang="ko-KR" altLang="en-US" smtClean="0"/>
-              <a:t>2026-03-19</a:t>
+              <a:t>2026-03-20</a:t>
             </a:fld>
             <a:endParaRPr lang="ko-KR" altLang="en-US"/>
           </a:p>
@@ -1120,10 +1113,9 @@
           <a:lstStyle/>
           <a:p>
             <a:r>
-              <a:rPr lang="ko-KR" altLang="en-US" smtClean="0"/>
+              <a:rPr lang="ko-KR" altLang="en-US"/>
               <a:t>마스터 제목 스타일 편집</a:t>
             </a:r>
-            <a:endParaRPr lang="ko-KR" altLang="en-US"/>
           </a:p>
         </p:txBody>
       </p:sp>
@@ -1149,38 +1141,37 @@
           <a:p>
             <a:pPr lvl="0"/>
             <a:r>
-              <a:rPr lang="ko-KR" altLang="en-US" smtClean="0"/>
+              <a:rPr lang="ko-KR" altLang="en-US"/>
               <a:t>마스터 텍스트 스타일 편집</a:t>
             </a:r>
           </a:p>
           <a:p>
             <a:pPr lvl="1"/>
             <a:r>
-              <a:rPr lang="ko-KR" altLang="en-US" smtClean="0"/>
+              <a:rPr lang="ko-KR" altLang="en-US"/>
               <a:t>둘째 수준</a:t>
             </a:r>
           </a:p>
           <a:p>
             <a:pPr lvl="2"/>
             <a:r>
-              <a:rPr lang="ko-KR" altLang="en-US" smtClean="0"/>
+              <a:rPr lang="ko-KR" altLang="en-US"/>
               <a:t>셋째 수준</a:t>
             </a:r>
           </a:p>
           <a:p>
             <a:pPr lvl="3"/>
             <a:r>
-              <a:rPr lang="ko-KR" altLang="en-US" smtClean="0"/>
+              <a:rPr lang="ko-KR" altLang="en-US"/>
               <a:t>넷째 수준</a:t>
             </a:r>
           </a:p>
           <a:p>
             <a:pPr lvl="4"/>
             <a:r>
-              <a:rPr lang="ko-KR" altLang="en-US" smtClean="0"/>
+              <a:rPr lang="ko-KR" altLang="en-US"/>
               <a:t>다섯째 수준</a:t>
             </a:r>
-            <a:endParaRPr lang="ko-KR" altLang="en-US"/>
           </a:p>
         </p:txBody>
       </p:sp>
@@ -1206,38 +1197,37 @@
           <a:p>
             <a:pPr lvl="0"/>
             <a:r>
-              <a:rPr lang="ko-KR" altLang="en-US" smtClean="0"/>
+              <a:rPr lang="ko-KR" altLang="en-US"/>
               <a:t>마스터 텍스트 스타일 편집</a:t>
             </a:r>
           </a:p>
           <a:p>
             <a:pPr lvl="1"/>
             <a:r>
-              <a:rPr lang="ko-KR" altLang="en-US" smtClean="0"/>
+              <a:rPr lang="ko-KR" altLang="en-US"/>
               <a:t>둘째 수준</a:t>
             </a:r>
           </a:p>
           <a:p>
             <a:pPr lvl="2"/>
             <a:r>
-              <a:rPr lang="ko-KR" altLang="en-US" smtClean="0"/>
+              <a:rPr lang="ko-KR" altLang="en-US"/>
               <a:t>셋째 수준</a:t>
             </a:r>
           </a:p>
           <a:p>
             <a:pPr lvl="3"/>
             <a:r>
-              <a:rPr lang="ko-KR" altLang="en-US" smtClean="0"/>
+              <a:rPr lang="ko-KR" altLang="en-US"/>
               <a:t>넷째 수준</a:t>
             </a:r>
           </a:p>
           <a:p>
             <a:pPr lvl="4"/>
             <a:r>
-              <a:rPr lang="ko-KR" altLang="en-US" smtClean="0"/>
+              <a:rPr lang="ko-KR" altLang="en-US"/>
               <a:t>다섯째 수준</a:t>
             </a:r>
-            <a:endParaRPr lang="ko-KR" altLang="en-US"/>
           </a:p>
         </p:txBody>
       </p:sp>
@@ -1258,7 +1248,7 @@
           <a:p>
             <a:fld id="{7ACD0341-1F12-4E49-993C-A6806D227CEE}" type="datetimeFigureOut">
               <a:rPr lang="ko-KR" altLang="en-US" smtClean="0"/>
-              <a:t>2026-03-19</a:t>
+              <a:t>2026-03-20</a:t>
             </a:fld>
             <a:endParaRPr lang="ko-KR" altLang="en-US"/>
           </a:p>
@@ -1357,10 +1347,9 @@
           <a:lstStyle/>
           <a:p>
             <a:r>
-              <a:rPr lang="ko-KR" altLang="en-US" smtClean="0"/>
+              <a:rPr lang="ko-KR" altLang="en-US"/>
               <a:t>마스터 제목 스타일 편집</a:t>
             </a:r>
-            <a:endParaRPr lang="ko-KR" altLang="en-US"/>
           </a:p>
         </p:txBody>
       </p:sp>
@@ -1423,7 +1412,7 @@
           <a:p>
             <a:pPr lvl="0"/>
             <a:r>
-              <a:rPr lang="ko-KR" altLang="en-US" smtClean="0"/>
+              <a:rPr lang="ko-KR" altLang="en-US"/>
               <a:t>마스터 텍스트 스타일 편집</a:t>
             </a:r>
           </a:p>
@@ -1451,38 +1440,37 @@
           <a:p>
             <a:pPr lvl="0"/>
             <a:r>
-              <a:rPr lang="ko-KR" altLang="en-US" smtClean="0"/>
+              <a:rPr lang="ko-KR" altLang="en-US"/>
               <a:t>마스터 텍스트 스타일 편집</a:t>
             </a:r>
           </a:p>
           <a:p>
             <a:pPr lvl="1"/>
             <a:r>
-              <a:rPr lang="ko-KR" altLang="en-US" smtClean="0"/>
+              <a:rPr lang="ko-KR" altLang="en-US"/>
               <a:t>둘째 수준</a:t>
             </a:r>
           </a:p>
           <a:p>
             <a:pPr lvl="2"/>
             <a:r>
-              <a:rPr lang="ko-KR" altLang="en-US" smtClean="0"/>
+              <a:rPr lang="ko-KR" altLang="en-US"/>
               <a:t>셋째 수준</a:t>
             </a:r>
           </a:p>
           <a:p>
             <a:pPr lvl="3"/>
             <a:r>
-              <a:rPr lang="ko-KR" altLang="en-US" smtClean="0"/>
+              <a:rPr lang="ko-KR" altLang="en-US"/>
               <a:t>넷째 수준</a:t>
             </a:r>
           </a:p>
           <a:p>
             <a:pPr lvl="4"/>
             <a:r>
-              <a:rPr lang="ko-KR" altLang="en-US" smtClean="0"/>
+              <a:rPr lang="ko-KR" altLang="en-US"/>
               <a:t>다섯째 수준</a:t>
             </a:r>
-            <a:endParaRPr lang="ko-KR" altLang="en-US"/>
           </a:p>
         </p:txBody>
       </p:sp>
@@ -1545,7 +1533,7 @@
           <a:p>
             <a:pPr lvl="0"/>
             <a:r>
-              <a:rPr lang="ko-KR" altLang="en-US" smtClean="0"/>
+              <a:rPr lang="ko-KR" altLang="en-US"/>
               <a:t>마스터 텍스트 스타일 편집</a:t>
             </a:r>
           </a:p>
@@ -1573,38 +1561,37 @@
           <a:p>
             <a:pPr lvl="0"/>
             <a:r>
-              <a:rPr lang="ko-KR" altLang="en-US" smtClean="0"/>
+              <a:rPr lang="ko-KR" altLang="en-US"/>
               <a:t>마스터 텍스트 스타일 편집</a:t>
             </a:r>
           </a:p>
           <a:p>
             <a:pPr lvl="1"/>
             <a:r>
-              <a:rPr lang="ko-KR" altLang="en-US" smtClean="0"/>
+              <a:rPr lang="ko-KR" altLang="en-US"/>
               <a:t>둘째 수준</a:t>
             </a:r>
           </a:p>
           <a:p>
             <a:pPr lvl="2"/>
             <a:r>
-              <a:rPr lang="ko-KR" altLang="en-US" smtClean="0"/>
+              <a:rPr lang="ko-KR" altLang="en-US"/>
               <a:t>셋째 수준</a:t>
             </a:r>
           </a:p>
           <a:p>
             <a:pPr lvl="3"/>
             <a:r>
-              <a:rPr lang="ko-KR" altLang="en-US" smtClean="0"/>
+              <a:rPr lang="ko-KR" altLang="en-US"/>
               <a:t>넷째 수준</a:t>
             </a:r>
           </a:p>
           <a:p>
             <a:pPr lvl="4"/>
             <a:r>
-              <a:rPr lang="ko-KR" altLang="en-US" smtClean="0"/>
+              <a:rPr lang="ko-KR" altLang="en-US"/>
               <a:t>다섯째 수준</a:t>
             </a:r>
-            <a:endParaRPr lang="ko-KR" altLang="en-US"/>
           </a:p>
         </p:txBody>
       </p:sp>
@@ -1625,7 +1612,7 @@
           <a:p>
             <a:fld id="{7ACD0341-1F12-4E49-993C-A6806D227CEE}" type="datetimeFigureOut">
               <a:rPr lang="ko-KR" altLang="en-US" smtClean="0"/>
-              <a:t>2026-03-19</a:t>
+              <a:t>2026-03-20</a:t>
             </a:fld>
             <a:endParaRPr lang="ko-KR" altLang="en-US"/>
           </a:p>
@@ -1719,10 +1706,9 @@
           <a:lstStyle/>
           <a:p>
             <a:r>
-              <a:rPr lang="ko-KR" altLang="en-US" smtClean="0"/>
+              <a:rPr lang="ko-KR" altLang="en-US"/>
               <a:t>마스터 제목 스타일 편집</a:t>
             </a:r>
-            <a:endParaRPr lang="ko-KR" altLang="en-US"/>
           </a:p>
         </p:txBody>
       </p:sp>
@@ -1743,7 +1729,7 @@
           <a:p>
             <a:fld id="{7ACD0341-1F12-4E49-993C-A6806D227CEE}" type="datetimeFigureOut">
               <a:rPr lang="ko-KR" altLang="en-US" smtClean="0"/>
-              <a:t>2026-03-19</a:t>
+              <a:t>2026-03-20</a:t>
             </a:fld>
             <a:endParaRPr lang="ko-KR" altLang="en-US"/>
           </a:p>
@@ -1838,7 +1824,7 @@
           <a:p>
             <a:fld id="{7ACD0341-1F12-4E49-993C-A6806D227CEE}" type="datetimeFigureOut">
               <a:rPr lang="ko-KR" altLang="en-US" smtClean="0"/>
-              <a:t>2026-03-19</a:t>
+              <a:t>2026-03-20</a:t>
             </a:fld>
             <a:endParaRPr lang="ko-KR" altLang="en-US"/>
           </a:p>
@@ -1941,10 +1927,9 @@
           </a:lstStyle>
           <a:p>
             <a:r>
-              <a:rPr lang="ko-KR" altLang="en-US" smtClean="0"/>
+              <a:rPr lang="ko-KR" altLang="en-US"/>
               <a:t>마스터 제목 스타일 편집</a:t>
             </a:r>
-            <a:endParaRPr lang="ko-KR" altLang="en-US"/>
           </a:p>
         </p:txBody>
       </p:sp>
@@ -1998,38 +1983,37 @@
           <a:p>
             <a:pPr lvl="0"/>
             <a:r>
-              <a:rPr lang="ko-KR" altLang="en-US" smtClean="0"/>
+              <a:rPr lang="ko-KR" altLang="en-US"/>
               <a:t>마스터 텍스트 스타일 편집</a:t>
             </a:r>
           </a:p>
           <a:p>
             <a:pPr lvl="1"/>
             <a:r>
-              <a:rPr lang="ko-KR" altLang="en-US" smtClean="0"/>
+              <a:rPr lang="ko-KR" altLang="en-US"/>
               <a:t>둘째 수준</a:t>
             </a:r>
           </a:p>
           <a:p>
             <a:pPr lvl="2"/>
             <a:r>
-              <a:rPr lang="ko-KR" altLang="en-US" smtClean="0"/>
+              <a:rPr lang="ko-KR" altLang="en-US"/>
               <a:t>셋째 수준</a:t>
             </a:r>
           </a:p>
           <a:p>
             <a:pPr lvl="3"/>
             <a:r>
-              <a:rPr lang="ko-KR" altLang="en-US" smtClean="0"/>
+              <a:rPr lang="ko-KR" altLang="en-US"/>
               <a:t>넷째 수준</a:t>
             </a:r>
           </a:p>
           <a:p>
             <a:pPr lvl="4"/>
             <a:r>
-              <a:rPr lang="ko-KR" altLang="en-US" smtClean="0"/>
+              <a:rPr lang="ko-KR" altLang="en-US"/>
               <a:t>다섯째 수준</a:t>
             </a:r>
-            <a:endParaRPr lang="ko-KR" altLang="en-US"/>
           </a:p>
         </p:txBody>
       </p:sp>
@@ -2092,7 +2076,7 @@
           <a:p>
             <a:pPr lvl="0"/>
             <a:r>
-              <a:rPr lang="ko-KR" altLang="en-US" smtClean="0"/>
+              <a:rPr lang="ko-KR" altLang="en-US"/>
               <a:t>마스터 텍스트 스타일 편집</a:t>
             </a:r>
           </a:p>
@@ -2115,7 +2099,7 @@
           <a:p>
             <a:fld id="{7ACD0341-1F12-4E49-993C-A6806D227CEE}" type="datetimeFigureOut">
               <a:rPr lang="ko-KR" altLang="en-US" smtClean="0"/>
-              <a:t>2026-03-19</a:t>
+              <a:t>2026-03-20</a:t>
             </a:fld>
             <a:endParaRPr lang="ko-KR" altLang="en-US"/>
           </a:p>
@@ -2218,10 +2202,9 @@
           </a:lstStyle>
           <a:p>
             <a:r>
-              <a:rPr lang="ko-KR" altLang="en-US" smtClean="0"/>
+              <a:rPr lang="ko-KR" altLang="en-US"/>
               <a:t>마스터 제목 스타일 편집</a:t>
             </a:r>
-            <a:endParaRPr lang="ko-KR" altLang="en-US"/>
           </a:p>
         </p:txBody>
       </p:sp>
@@ -2345,7 +2328,7 @@
           <a:p>
             <a:pPr lvl="0"/>
             <a:r>
-              <a:rPr lang="ko-KR" altLang="en-US" smtClean="0"/>
+              <a:rPr lang="ko-KR" altLang="en-US"/>
               <a:t>마스터 텍스트 스타일 편집</a:t>
             </a:r>
           </a:p>
@@ -2368,7 +2351,7 @@
           <a:p>
             <a:fld id="{7ACD0341-1F12-4E49-993C-A6806D227CEE}" type="datetimeFigureOut">
               <a:rPr lang="ko-KR" altLang="en-US" smtClean="0"/>
-              <a:t>2026-03-19</a:t>
+              <a:t>2026-03-20</a:t>
             </a:fld>
             <a:endParaRPr lang="ko-KR" altLang="en-US"/>
           </a:p>
@@ -2477,10 +2460,9 @@
           <a:lstStyle/>
           <a:p>
             <a:r>
-              <a:rPr lang="ko-KR" altLang="en-US" smtClean="0"/>
+              <a:rPr lang="ko-KR" altLang="en-US"/>
               <a:t>마스터 제목 스타일 편집</a:t>
             </a:r>
-            <a:endParaRPr lang="ko-KR" altLang="en-US"/>
           </a:p>
         </p:txBody>
       </p:sp>
@@ -2511,38 +2493,37 @@
           <a:p>
             <a:pPr lvl="0"/>
             <a:r>
-              <a:rPr lang="ko-KR" altLang="en-US" smtClean="0"/>
+              <a:rPr lang="ko-KR" altLang="en-US"/>
               <a:t>마스터 텍스트 스타일 편집</a:t>
             </a:r>
           </a:p>
           <a:p>
             <a:pPr lvl="1"/>
             <a:r>
-              <a:rPr lang="ko-KR" altLang="en-US" smtClean="0"/>
+              <a:rPr lang="ko-KR" altLang="en-US"/>
               <a:t>둘째 수준</a:t>
             </a:r>
           </a:p>
           <a:p>
             <a:pPr lvl="2"/>
             <a:r>
-              <a:rPr lang="ko-KR" altLang="en-US" smtClean="0"/>
+              <a:rPr lang="ko-KR" altLang="en-US"/>
               <a:t>셋째 수준</a:t>
             </a:r>
           </a:p>
           <a:p>
             <a:pPr lvl="3"/>
             <a:r>
-              <a:rPr lang="ko-KR" altLang="en-US" smtClean="0"/>
+              <a:rPr lang="ko-KR" altLang="en-US"/>
               <a:t>넷째 수준</a:t>
             </a:r>
           </a:p>
           <a:p>
             <a:pPr lvl="4"/>
             <a:r>
-              <a:rPr lang="ko-KR" altLang="en-US" smtClean="0"/>
+              <a:rPr lang="ko-KR" altLang="en-US"/>
               <a:t>다섯째 수준</a:t>
             </a:r>
-            <a:endParaRPr lang="ko-KR" altLang="en-US"/>
           </a:p>
         </p:txBody>
       </p:sp>
@@ -2581,7 +2562,7 @@
           <a:p>
             <a:fld id="{7ACD0341-1F12-4E49-993C-A6806D227CEE}" type="datetimeFigureOut">
               <a:rPr lang="ko-KR" altLang="en-US" smtClean="0"/>
-              <a:t>2026-03-19</a:t>
+              <a:t>2026-03-20</a:t>
             </a:fld>
             <a:endParaRPr lang="ko-KR" altLang="en-US"/>
           </a:p>
@@ -3002,18 +2983,17 @@
           <a:lstStyle/>
           <a:p>
             <a:r>
-              <a:rPr lang="ko-KR" altLang="en-US" smtClean="0"/>
+              <a:rPr lang="ko-KR" altLang="en-US"/>
               <a:t>소재 </a:t>
             </a:r>
             <a:r>
-              <a:rPr lang="en-US" altLang="ko-KR" smtClean="0"/>
+              <a:rPr lang="en-US" altLang="ko-KR"/>
               <a:t>(2) - </a:t>
             </a:r>
             <a:r>
-              <a:rPr lang="ko-KR" altLang="en-US" smtClean="0"/>
+              <a:rPr lang="ko-KR" altLang="en-US"/>
               <a:t>출사표</a:t>
             </a:r>
-            <a:endParaRPr lang="ko-KR" altLang="en-US"/>
           </a:p>
         </p:txBody>
       </p:sp>
@@ -3040,85 +3020,85 @@
           <a:lstStyle/>
           <a:p>
             <a:r>
-              <a:rPr lang="ko-KR" altLang="en-US" smtClean="0"/>
+              <a:rPr lang="ko-KR" altLang="en-US"/>
               <a:t>난세</a:t>
             </a:r>
-            <a:endParaRPr lang="en-US" altLang="ko-KR" smtClean="0"/>
+            <a:endParaRPr lang="en-US" altLang="ko-KR"/>
           </a:p>
           <a:p>
             <a:pPr lvl="1"/>
             <a:r>
-              <a:rPr lang="ko-KR" altLang="en-US" smtClean="0"/>
+              <a:rPr lang="ko-KR" altLang="en-US"/>
               <a:t>군주 </a:t>
             </a:r>
             <a:r>
-              <a:rPr lang="en-US" altLang="ko-KR" smtClean="0"/>
+              <a:rPr lang="en-US" altLang="ko-KR"/>
               <a:t>; </a:t>
             </a:r>
             <a:r>
-              <a:rPr lang="ko-KR" altLang="en-US" smtClean="0"/>
+              <a:rPr lang="ko-KR" altLang="en-US"/>
               <a:t>앞장서는 사람</a:t>
             </a:r>
-            <a:endParaRPr lang="en-US" altLang="ko-KR" smtClean="0"/>
+            <a:endParaRPr lang="en-US" altLang="ko-KR"/>
           </a:p>
           <a:p>
             <a:pPr lvl="1"/>
             <a:r>
-              <a:rPr lang="ko-KR" altLang="en-US" smtClean="0"/>
+              <a:rPr lang="ko-KR" altLang="en-US"/>
               <a:t>군주를 보필하는 사람</a:t>
             </a:r>
-            <a:endParaRPr lang="en-US" altLang="ko-KR" smtClean="0"/>
+            <a:endParaRPr lang="en-US" altLang="ko-KR"/>
           </a:p>
           <a:p>
             <a:pPr lvl="1"/>
             <a:r>
-              <a:rPr lang="ko-KR" altLang="en-US" smtClean="0"/>
+              <a:rPr lang="ko-KR" altLang="en-US"/>
               <a:t>끌려온 사람</a:t>
             </a:r>
-            <a:endParaRPr lang="en-US" altLang="ko-KR" smtClean="0"/>
+            <a:endParaRPr lang="en-US" altLang="ko-KR"/>
           </a:p>
           <a:p>
             <a:pPr lvl="1"/>
             <a:r>
-              <a:rPr lang="ko-KR" altLang="en-US" smtClean="0"/>
+              <a:rPr lang="ko-KR" altLang="en-US"/>
               <a:t>개인의 이익을 챙기는 사람</a:t>
             </a:r>
             <a:endParaRPr lang="en-US" altLang="ko-KR"/>
           </a:p>
           <a:p>
             <a:r>
-              <a:rPr lang="ko-KR" altLang="en-US" smtClean="0"/>
+              <a:rPr lang="ko-KR" altLang="en-US"/>
               <a:t>전쟁에서 피라미드 구조 상 아래로 갈수록 목숨의 가치도 낮아진다</a:t>
             </a:r>
             <a:r>
-              <a:rPr lang="en-US" altLang="ko-KR" smtClean="0"/>
+              <a:rPr lang="en-US" altLang="ko-KR"/>
               <a:t>.</a:t>
             </a:r>
             <a:br>
-              <a:rPr lang="en-US" altLang="ko-KR" smtClean="0"/>
+              <a:rPr lang="en-US" altLang="ko-KR"/>
             </a:br>
             <a:r>
-              <a:rPr lang="ko-KR" altLang="en-US" smtClean="0"/>
+              <a:rPr lang="ko-KR" altLang="en-US"/>
               <a:t>예</a:t>
             </a:r>
             <a:r>
-              <a:rPr lang="en-US" altLang="ko-KR" smtClean="0"/>
+              <a:rPr lang="en-US" altLang="ko-KR"/>
               <a:t>) </a:t>
             </a:r>
             <a:r>
-              <a:rPr lang="ko-KR" altLang="en-US" smtClean="0"/>
+              <a:rPr lang="ko-KR" altLang="en-US"/>
               <a:t>꼭대기의 사람들의 잘못은 관대</a:t>
             </a:r>
             <a:r>
-              <a:rPr lang="en-US" altLang="ko-KR" smtClean="0"/>
+              <a:rPr lang="en-US" altLang="ko-KR"/>
               <a:t>, </a:t>
             </a:r>
             <a:r>
-              <a:rPr lang="ko-KR" altLang="en-US" smtClean="0"/>
+              <a:rPr lang="ko-KR" altLang="en-US"/>
               <a:t>아래쪽의 사람들의 잘못은 참수</a:t>
             </a:r>
             <a:r>
-              <a:rPr lang="en-US" altLang="ko-KR" smtClean="0"/>
+              <a:rPr lang="en-US" altLang="ko-KR"/>
               <a:t>.</a:t>
             </a:r>
           </a:p>
@@ -3127,28 +3107,28 @@
           </a:p>
           <a:p>
             <a:r>
-              <a:rPr lang="ko-KR" altLang="en-US" smtClean="0"/>
+              <a:rPr lang="ko-KR" altLang="en-US"/>
               <a:t>당신은 이 난세에 어디에 있을 것인가</a:t>
             </a:r>
             <a:r>
-              <a:rPr lang="en-US" altLang="ko-KR" smtClean="0"/>
+              <a:rPr lang="en-US" altLang="ko-KR"/>
               <a:t>.</a:t>
             </a:r>
           </a:p>
           <a:p>
-            <a:endParaRPr lang="en-US" altLang="ko-KR" smtClean="0"/>
-          </a:p>
-          <a:p>
-            <a:r>
-              <a:rPr lang="en-US" altLang="ko-KR" smtClean="0"/>
+            <a:endParaRPr lang="en-US" altLang="ko-KR"/>
+          </a:p>
+          <a:p>
+            <a:r>
+              <a:rPr lang="en-US" altLang="ko-KR"/>
               <a:t>[</a:t>
             </a:r>
             <a:r>
-              <a:rPr lang="ko-KR" altLang="en-US" smtClean="0"/>
+              <a:rPr lang="ko-KR" altLang="en-US"/>
               <a:t>창청황노</a:t>
             </a:r>
             <a:r>
-              <a:rPr lang="en-US" altLang="ko-KR" smtClean="0"/>
+              <a:rPr lang="en-US" altLang="ko-KR"/>
               <a:t>(?)]</a:t>
             </a:r>
             <a:endParaRPr lang="ko-KR" altLang="en-US"/>
@@ -3201,18 +3181,17 @@
           <a:lstStyle/>
           <a:p>
             <a:r>
-              <a:rPr lang="ko-KR" altLang="en-US" smtClean="0"/>
+              <a:rPr lang="ko-KR" altLang="en-US"/>
               <a:t>살아움직이는 글쓰기</a:t>
             </a:r>
             <a:r>
-              <a:rPr lang="en-US" altLang="ko-KR" smtClean="0"/>
+              <a:rPr lang="en-US" altLang="ko-KR"/>
               <a:t>. </a:t>
             </a:r>
             <a:r>
-              <a:rPr lang="ko-KR" altLang="en-US" smtClean="0"/>
+              <a:rPr lang="ko-KR" altLang="en-US"/>
               <a:t>가능성의 글쓰기</a:t>
             </a:r>
-            <a:endParaRPr lang="ko-KR" altLang="en-US"/>
           </a:p>
         </p:txBody>
       </p:sp>
@@ -3232,71 +3211,67 @@
           <a:lstStyle/>
           <a:p>
             <a:r>
-              <a:rPr lang="ko-KR" altLang="en-US" smtClean="0"/>
+              <a:rPr lang="ko-KR" altLang="en-US"/>
               <a:t>자율</a:t>
             </a:r>
             <a:r>
-              <a:rPr lang="en-US" altLang="ko-KR" smtClean="0"/>
+              <a:rPr lang="en-US" altLang="ko-KR"/>
               <a:t>.</a:t>
             </a:r>
             <a:r>
-              <a:rPr lang="ko-KR" altLang="en-US" smtClean="0"/>
+              <a:rPr lang="ko-KR" altLang="en-US"/>
               <a:t>창조적인 이야기</a:t>
             </a:r>
-            <a:endParaRPr lang="en-US" altLang="ko-KR" smtClean="0"/>
-          </a:p>
-          <a:p>
-            <a:r>
-              <a:rPr lang="ko-KR" altLang="en-US" smtClean="0"/>
+            <a:endParaRPr lang="en-US" altLang="ko-KR"/>
+          </a:p>
+          <a:p>
+            <a:r>
+              <a:rPr lang="ko-KR" altLang="en-US"/>
               <a:t>창발적인 스토리텔링 </a:t>
             </a:r>
             <a:r>
-              <a:rPr lang="en-US" altLang="ko-KR" smtClean="0"/>
+              <a:rPr lang="en-US" altLang="ko-KR"/>
               <a:t>: </a:t>
             </a:r>
             <a:r>
-              <a:rPr lang="ko-KR" altLang="en-US" smtClean="0"/>
+              <a:rPr lang="ko-KR" altLang="en-US"/>
               <a:t>이야기가 소모되면서</a:t>
             </a:r>
             <a:r>
-              <a:rPr lang="en-US" altLang="ko-KR" smtClean="0"/>
+              <a:rPr lang="en-US" altLang="ko-KR"/>
               <a:t>, </a:t>
             </a:r>
             <a:r>
-              <a:rPr lang="ko-KR" altLang="en-US" smtClean="0"/>
+              <a:rPr lang="ko-KR" altLang="en-US"/>
               <a:t>새로운 이야기가 만들어지는 스토리</a:t>
             </a:r>
-            <a:endParaRPr lang="en-US" altLang="ko-KR" smtClean="0"/>
-          </a:p>
-          <a:p>
             <a:endParaRPr lang="en-US" altLang="ko-KR"/>
           </a:p>
           <a:p>
-            <a:r>
-              <a:rPr lang="ko-KR" altLang="en-US" smtClean="0"/>
+            <a:endParaRPr lang="en-US" altLang="ko-KR"/>
+          </a:p>
+          <a:p>
+            <a:r>
+              <a:rPr lang="ko-KR" altLang="en-US"/>
               <a:t>우리는 완결</a:t>
             </a:r>
             <a:r>
-              <a:rPr lang="en-US" altLang="ko-KR" smtClean="0"/>
+              <a:rPr lang="en-US" altLang="ko-KR"/>
               <a:t>?</a:t>
             </a:r>
             <a:r>
-              <a:rPr lang="ko-KR" altLang="en-US" smtClean="0"/>
+              <a:rPr lang="ko-KR" altLang="en-US"/>
               <a:t>완벽한 글쓰기보다는</a:t>
             </a:r>
-            <a:r>
-              <a:rPr lang="en-US" altLang="ko-KR" smtClean="0"/>
-              <a:t/>
-            </a:r>
             <a:br>
-              <a:rPr lang="en-US" altLang="ko-KR" smtClean="0"/>
+              <a:rPr lang="en-US" altLang="ko-KR"/>
             </a:br>
             <a:r>
-              <a:rPr lang="ko-KR" altLang="en-US" smtClean="0"/>
+              <a:rPr lang="ko-KR" altLang="en-US"/>
               <a:t>기회를 주는 글쓰기를 하도록 노력해야 한다</a:t>
             </a:r>
             <a:r>
-              <a:rPr lang="en-US" altLang="ko-KR" smtClean="0"/>
+              <a:rPr lang="en-US" altLang="ko-KR"/>
               <a:t>.</a:t>
             </a:r>
             <a:endParaRPr lang="ko-KR" altLang="en-US"/>
@@ -3349,10 +3324,9 @@
           <a:lstStyle/>
           <a:p>
             <a:r>
-              <a:rPr lang="ko-KR" altLang="en-US" smtClean="0"/>
+              <a:rPr lang="ko-KR" altLang="en-US"/>
               <a:t>내일 배울 것</a:t>
             </a:r>
-            <a:endParaRPr lang="ko-KR" altLang="en-US"/>
           </a:p>
         </p:txBody>
       </p:sp>
@@ -3372,20 +3346,19 @@
           <a:lstStyle/>
           <a:p>
             <a:r>
-              <a:rPr lang="ko-KR" altLang="en-US" smtClean="0"/>
+              <a:rPr lang="ko-KR" altLang="en-US"/>
               <a:t>플롯</a:t>
             </a:r>
-            <a:endParaRPr lang="en-US" altLang="ko-KR" smtClean="0"/>
-          </a:p>
-          <a:p>
             <a:endParaRPr lang="en-US" altLang="ko-KR"/>
           </a:p>
           <a:p>
-            <a:r>
-              <a:rPr lang="ko-KR" altLang="en-US" smtClean="0"/>
+            <a:endParaRPr lang="en-US" altLang="ko-KR"/>
+          </a:p>
+          <a:p>
+            <a:r>
+              <a:rPr lang="ko-KR" altLang="en-US"/>
               <a:t>선배들의 글쓰기를 참고하는 것</a:t>
             </a:r>
-            <a:endParaRPr lang="ko-KR" altLang="en-US"/>
           </a:p>
         </p:txBody>
       </p:sp>
@@ -3435,18 +3408,17 @@
           <a:lstStyle/>
           <a:p>
             <a:r>
-              <a:rPr lang="ko-KR" altLang="en-US" smtClean="0"/>
+              <a:rPr lang="ko-KR" altLang="en-US"/>
               <a:t>도구 </a:t>
             </a:r>
             <a:r>
-              <a:rPr lang="en-US" altLang="ko-KR" smtClean="0"/>
+              <a:rPr lang="en-US" altLang="ko-KR"/>
               <a:t>(4) </a:t>
             </a:r>
             <a:r>
-              <a:rPr lang="ko-KR" altLang="en-US" smtClean="0"/>
+              <a:rPr lang="ko-KR" altLang="en-US"/>
               <a:t>라이브러리</a:t>
             </a:r>
-            <a:endParaRPr lang="ko-KR" altLang="en-US"/>
           </a:p>
         </p:txBody>
       </p:sp>
@@ -3466,31 +3438,31 @@
           <a:lstStyle/>
           <a:p>
             <a:r>
-              <a:rPr lang="en-US" altLang="ko-KR" smtClean="0"/>
+              <a:rPr lang="en-US" altLang="ko-KR"/>
               <a:t>＇</a:t>
             </a:r>
             <a:r>
-              <a:rPr lang="ko-KR" altLang="en-US" smtClean="0"/>
+              <a:rPr lang="ko-KR" altLang="en-US"/>
               <a:t>명작</a:t>
             </a:r>
             <a:r>
-              <a:rPr lang="en-US" altLang="ko-KR" smtClean="0"/>
+              <a:rPr lang="en-US" altLang="ko-KR"/>
               <a:t>’</a:t>
             </a:r>
             <a:r>
-              <a:rPr lang="ko-KR" altLang="en-US" smtClean="0"/>
+              <a:rPr lang="ko-KR" altLang="en-US"/>
               <a:t>들을 목록화</a:t>
             </a:r>
             <a:r>
-              <a:rPr lang="en-US" altLang="ko-KR" smtClean="0"/>
+              <a:rPr lang="en-US" altLang="ko-KR"/>
               <a:t>. </a:t>
             </a:r>
             <a:r>
-              <a:rPr lang="ko-KR" altLang="en-US" smtClean="0"/>
+              <a:rPr lang="ko-KR" altLang="en-US"/>
               <a:t>리스트화하자</a:t>
             </a:r>
             <a:r>
-              <a:rPr lang="en-US" altLang="ko-KR" smtClean="0"/>
+              <a:rPr lang="en-US" altLang="ko-KR"/>
               <a:t>.</a:t>
             </a:r>
           </a:p>
@@ -3499,62 +3471,58 @@
           </a:p>
           <a:p>
             <a:r>
-              <a:rPr lang="ko-KR" altLang="en-US" smtClean="0"/>
+              <a:rPr lang="ko-KR" altLang="en-US"/>
               <a:t>인생의 콘텐츠</a:t>
             </a:r>
-            <a:r>
-              <a:rPr lang="en-US" altLang="ko-KR" smtClean="0"/>
-              <a:t/>
-            </a:r>
             <a:br>
-              <a:rPr lang="en-US" altLang="ko-KR" smtClean="0"/>
+              <a:rPr lang="en-US" altLang="ko-KR"/>
             </a:br>
             <a:r>
-              <a:rPr lang="ko-KR" altLang="en-US" smtClean="0"/>
+              <a:rPr lang="ko-KR" altLang="en-US"/>
               <a:t>영화</a:t>
             </a:r>
             <a:r>
-              <a:rPr lang="en-US" altLang="ko-KR" smtClean="0"/>
+              <a:rPr lang="en-US" altLang="ko-KR"/>
               <a:t>, </a:t>
             </a:r>
             <a:r>
-              <a:rPr lang="ko-KR" altLang="en-US" smtClean="0"/>
+              <a:rPr lang="ko-KR" altLang="en-US"/>
               <a:t>게임</a:t>
             </a:r>
             <a:r>
-              <a:rPr lang="en-US" altLang="ko-KR" smtClean="0"/>
+              <a:rPr lang="en-US" altLang="ko-KR"/>
               <a:t>, </a:t>
             </a:r>
             <a:r>
-              <a:rPr lang="ko-KR" altLang="en-US" smtClean="0"/>
+              <a:rPr lang="ko-KR" altLang="en-US"/>
               <a:t>드라마</a:t>
             </a:r>
             <a:r>
-              <a:rPr lang="en-US" altLang="ko-KR" smtClean="0"/>
+              <a:rPr lang="en-US" altLang="ko-KR"/>
               <a:t>, </a:t>
             </a:r>
             <a:r>
-              <a:rPr lang="ko-KR" altLang="en-US" smtClean="0"/>
+              <a:rPr lang="ko-KR" altLang="en-US"/>
               <a:t>대중 가요 등 무엇이든</a:t>
             </a:r>
             <a:r>
-              <a:rPr lang="en-US" altLang="ko-KR" smtClean="0"/>
+              <a:rPr lang="en-US" altLang="ko-KR"/>
               <a:t>, </a:t>
             </a:r>
             <a:r>
-              <a:rPr lang="ko-KR" altLang="en-US" smtClean="0"/>
+              <a:rPr lang="ko-KR" altLang="en-US"/>
               <a:t>스토리텔링을 담고 있는 것에 대해 </a:t>
             </a:r>
             <a:r>
-              <a:rPr lang="en-US" altLang="ko-KR" smtClean="0"/>
+              <a:rPr lang="en-US" altLang="ko-KR"/>
               <a:t>1~5</a:t>
             </a:r>
             <a:r>
-              <a:rPr lang="ko-KR" altLang="en-US" smtClean="0"/>
+              <a:rPr lang="ko-KR" altLang="en-US"/>
               <a:t>순위까지 리스트화해보자</a:t>
             </a:r>
             <a:r>
-              <a:rPr lang="en-US" altLang="ko-KR" smtClean="0"/>
+              <a:rPr lang="en-US" altLang="ko-KR"/>
               <a:t>.</a:t>
             </a:r>
             <a:endParaRPr lang="ko-KR" altLang="en-US"/>
@@ -3607,10 +3575,9 @@
           <a:lstStyle/>
           <a:p>
             <a:r>
-              <a:rPr lang="ko-KR" altLang="en-US" smtClean="0"/>
+              <a:rPr lang="ko-KR" altLang="en-US"/>
               <a:t>나만의 라이브러리</a:t>
             </a:r>
-            <a:endParaRPr lang="ko-KR" altLang="en-US"/>
           </a:p>
         </p:txBody>
       </p:sp>
@@ -3641,29 +3608,29 @@
               <a:buAutoNum type="arabicPeriod"/>
             </a:pPr>
             <a:r>
-              <a:rPr lang="en-US" altLang="ko-KR" smtClean="0"/>
+              <a:rPr lang="en-US" altLang="ko-KR"/>
               <a:t>(</a:t>
             </a:r>
             <a:r>
-              <a:rPr lang="ko-KR" altLang="en-US" smtClean="0"/>
+              <a:rPr lang="ko-KR" altLang="en-US"/>
               <a:t>대중 가요</a:t>
             </a:r>
             <a:r>
-              <a:rPr lang="en-US" altLang="ko-KR" smtClean="0"/>
+              <a:rPr lang="en-US" altLang="ko-KR"/>
               <a:t>) You are a miracle</a:t>
             </a:r>
             <a:br>
-              <a:rPr lang="en-US" altLang="ko-KR" smtClean="0"/>
+              <a:rPr lang="en-US" altLang="ko-KR"/>
             </a:br>
             <a:r>
-              <a:rPr lang="en-US" altLang="ko-KR" smtClean="0"/>
+              <a:rPr lang="en-US" altLang="ko-KR"/>
               <a:t>-&gt; </a:t>
             </a:r>
             <a:r>
-              <a:rPr lang="ko-KR" altLang="en-US" smtClean="0"/>
+              <a:rPr lang="ko-KR" altLang="en-US"/>
               <a:t>집단적 메시지를 통한 자기 존재 가치의 재인식</a:t>
             </a:r>
-            <a:endParaRPr lang="en-US" altLang="ko-KR" smtClean="0"/>
+            <a:endParaRPr lang="en-US" altLang="ko-KR"/>
           </a:p>
           <a:p>
             <a:pPr marL="514350" indent="-514350">
@@ -3671,45 +3638,41 @@
               <a:buAutoNum type="arabicPeriod"/>
             </a:pPr>
             <a:r>
-              <a:rPr lang="en-US" altLang="ko-KR" smtClean="0"/>
+              <a:rPr lang="en-US" altLang="ko-KR"/>
               <a:t>(</a:t>
             </a:r>
             <a:r>
-              <a:rPr lang="ko-KR" altLang="en-US" smtClean="0"/>
+              <a:rPr lang="ko-KR" altLang="en-US"/>
               <a:t>영화</a:t>
             </a:r>
             <a:r>
-              <a:rPr lang="en-US" altLang="ko-KR" smtClean="0"/>
+              <a:rPr lang="en-US" altLang="ko-KR"/>
               <a:t>) </a:t>
             </a:r>
             <a:r>
-              <a:rPr lang="ko-KR" altLang="en-US" smtClean="0"/>
+              <a:rPr lang="ko-KR" altLang="en-US"/>
               <a:t>코코</a:t>
             </a:r>
-            <a:r>
-              <a:rPr lang="en-US" altLang="ko-KR" smtClean="0"/>
-              <a:t/>
-            </a:r>
             <a:br>
-              <a:rPr lang="en-US" altLang="ko-KR" smtClean="0"/>
+              <a:rPr lang="en-US" altLang="ko-KR"/>
             </a:br>
             <a:r>
-              <a:rPr lang="en-US" altLang="ko-KR" smtClean="0"/>
+              <a:rPr lang="en-US" altLang="ko-KR"/>
               <a:t>-&gt; </a:t>
             </a:r>
             <a:r>
-              <a:rPr lang="ko-KR" altLang="en-US" smtClean="0"/>
+              <a:rPr lang="ko-KR" altLang="en-US"/>
               <a:t>가족 서사와 감각적 미장센</a:t>
             </a:r>
             <a:r>
-              <a:rPr lang="en-US" altLang="ko-KR" smtClean="0"/>
+              <a:rPr lang="en-US" altLang="ko-KR"/>
               <a:t>, </a:t>
             </a:r>
             <a:r>
-              <a:rPr lang="ko-KR" altLang="en-US" smtClean="0"/>
+              <a:rPr lang="ko-KR" altLang="en-US"/>
               <a:t>음악이 결합된 정서적 몰입 경험</a:t>
             </a:r>
-            <a:endParaRPr lang="en-US" altLang="ko-KR" smtClean="0"/>
+            <a:endParaRPr lang="en-US" altLang="ko-KR"/>
           </a:p>
           <a:p>
             <a:pPr marL="514350" indent="-514350">
@@ -3717,37 +3680,33 @@
               <a:buAutoNum type="arabicPeriod"/>
             </a:pPr>
             <a:r>
-              <a:rPr lang="en-US" altLang="ko-KR" smtClean="0"/>
+              <a:rPr lang="en-US" altLang="ko-KR"/>
               <a:t>(</a:t>
             </a:r>
             <a:r>
-              <a:rPr lang="ko-KR" altLang="en-US" smtClean="0"/>
+              <a:rPr lang="ko-KR" altLang="en-US"/>
               <a:t>영화</a:t>
             </a:r>
             <a:r>
-              <a:rPr lang="en-US" altLang="ko-KR" smtClean="0"/>
+              <a:rPr lang="en-US" altLang="ko-KR"/>
               <a:t>) </a:t>
             </a:r>
             <a:r>
-              <a:rPr lang="ko-KR" altLang="en-US" smtClean="0"/>
+              <a:rPr lang="ko-KR" altLang="en-US"/>
               <a:t>레디플레이어원</a:t>
             </a:r>
-            <a:r>
-              <a:rPr lang="en-US" altLang="ko-KR" smtClean="0"/>
-              <a:t/>
-            </a:r>
             <a:br>
-              <a:rPr lang="en-US" altLang="ko-KR" smtClean="0"/>
+              <a:rPr lang="en-US" altLang="ko-KR"/>
             </a:br>
             <a:r>
-              <a:rPr lang="en-US" altLang="ko-KR" smtClean="0"/>
+              <a:rPr lang="en-US" altLang="ko-KR"/>
               <a:t>-&gt; </a:t>
             </a:r>
             <a:r>
-              <a:rPr lang="ko-KR" altLang="en-US" smtClean="0"/>
+              <a:rPr lang="ko-KR" altLang="en-US"/>
               <a:t>가상 권력 상황 속 인간성에 대한 윤리적 자기 질문 유도</a:t>
             </a:r>
-            <a:endParaRPr lang="en-US" altLang="ko-KR" smtClean="0"/>
+            <a:endParaRPr lang="en-US" altLang="ko-KR"/>
           </a:p>
           <a:p>
             <a:pPr marL="514350" indent="-514350">
@@ -3755,37 +3714,33 @@
               <a:buAutoNum type="arabicPeriod"/>
             </a:pPr>
             <a:r>
-              <a:rPr lang="en-US" altLang="ko-KR" smtClean="0"/>
+              <a:rPr lang="en-US" altLang="ko-KR"/>
               <a:t>(</a:t>
             </a:r>
             <a:r>
-              <a:rPr lang="ko-KR" altLang="en-US" smtClean="0"/>
+              <a:rPr lang="ko-KR" altLang="en-US"/>
               <a:t>드라마</a:t>
             </a:r>
             <a:r>
-              <a:rPr lang="en-US" altLang="ko-KR" smtClean="0"/>
+              <a:rPr lang="en-US" altLang="ko-KR"/>
               <a:t>) </a:t>
             </a:r>
             <a:r>
-              <a:rPr lang="ko-KR" altLang="en-US" smtClean="0"/>
+              <a:rPr lang="ko-KR" altLang="en-US"/>
               <a:t>소년심판</a:t>
             </a:r>
-            <a:r>
-              <a:rPr lang="en-US" altLang="ko-KR"/>
-              <a:t/>
-            </a:r>
             <a:br>
               <a:rPr lang="en-US" altLang="ko-KR"/>
             </a:br>
             <a:r>
-              <a:rPr lang="en-US" altLang="ko-KR" smtClean="0"/>
+              <a:rPr lang="en-US" altLang="ko-KR"/>
               <a:t>-&gt; </a:t>
             </a:r>
             <a:r>
-              <a:rPr lang="ko-KR" altLang="en-US" smtClean="0"/>
+              <a:rPr lang="ko-KR" altLang="en-US"/>
               <a:t>감정과 법리 사이의 긴장을 통해 사회적 책임 문제를 조명</a:t>
             </a:r>
-            <a:endParaRPr lang="en-US" altLang="ko-KR" smtClean="0"/>
+            <a:endParaRPr lang="en-US" altLang="ko-KR"/>
           </a:p>
           <a:p>
             <a:pPr marL="514350" indent="-514350">
@@ -3793,37 +3748,33 @@
               <a:buAutoNum type="arabicPeriod"/>
             </a:pPr>
             <a:r>
-              <a:rPr lang="en-US" altLang="ko-KR" smtClean="0"/>
+              <a:rPr lang="en-US" altLang="ko-KR"/>
               <a:t>(</a:t>
             </a:r>
             <a:r>
-              <a:rPr lang="ko-KR" altLang="en-US" smtClean="0"/>
+              <a:rPr lang="ko-KR" altLang="en-US"/>
               <a:t>드라마</a:t>
             </a:r>
             <a:r>
-              <a:rPr lang="en-US" altLang="ko-KR" smtClean="0"/>
+              <a:rPr lang="en-US" altLang="ko-KR"/>
               <a:t>) </a:t>
             </a:r>
             <a:r>
-              <a:rPr lang="ko-KR" altLang="en-US" smtClean="0"/>
+              <a:rPr lang="ko-KR" altLang="en-US"/>
               <a:t>모범택시</a:t>
             </a:r>
-            <a:r>
-              <a:rPr lang="en-US" altLang="ko-KR" smtClean="0"/>
-              <a:t/>
-            </a:r>
             <a:br>
-              <a:rPr lang="en-US" altLang="ko-KR" smtClean="0"/>
+              <a:rPr lang="en-US" altLang="ko-KR"/>
             </a:br>
             <a:r>
-              <a:rPr lang="en-US" altLang="ko-KR" smtClean="0"/>
+              <a:rPr lang="en-US" altLang="ko-KR"/>
               <a:t>-&gt; </a:t>
             </a:r>
             <a:r>
-              <a:rPr lang="ko-KR" altLang="en-US" smtClean="0"/>
+              <a:rPr lang="ko-KR" altLang="en-US"/>
               <a:t>대리 정의 실현을 통한 카타르시스와 현실 공감의 극대화</a:t>
             </a:r>
-            <a:endParaRPr lang="en-US" altLang="ko-KR" smtClean="0"/>
+            <a:endParaRPr lang="en-US" altLang="ko-KR"/>
           </a:p>
         </p:txBody>
       </p:sp>
@@ -3873,18 +3824,17 @@
           <a:lstStyle/>
           <a:p>
             <a:r>
-              <a:rPr lang="ko-KR" altLang="en-US" smtClean="0"/>
+              <a:rPr lang="ko-KR" altLang="en-US"/>
               <a:t>나만의 라이브러리 </a:t>
             </a:r>
             <a:r>
-              <a:rPr lang="en-US" altLang="ko-KR" smtClean="0"/>
+              <a:rPr lang="en-US" altLang="ko-KR"/>
               <a:t>- </a:t>
             </a:r>
             <a:r>
-              <a:rPr lang="ko-KR" altLang="en-US" smtClean="0"/>
+              <a:rPr lang="ko-KR" altLang="en-US"/>
               <a:t>드라마</a:t>
             </a:r>
-            <a:endParaRPr lang="ko-KR" altLang="en-US"/>
           </a:p>
         </p:txBody>
       </p:sp>
@@ -3908,10 +3858,10 @@
               <a:buAutoNum type="arabicPeriod"/>
             </a:pPr>
             <a:r>
-              <a:rPr lang="ko-KR" altLang="en-US" smtClean="0"/>
+              <a:rPr lang="ko-KR" altLang="en-US" dirty="0"/>
               <a:t>소년 심판</a:t>
             </a:r>
-            <a:endParaRPr lang="en-US" altLang="ko-KR" smtClean="0"/>
+            <a:endParaRPr lang="en-US" altLang="ko-KR" dirty="0"/>
           </a:p>
           <a:p>
             <a:pPr marL="514350" indent="-514350">
@@ -3919,10 +3869,99 @@
               <a:buAutoNum type="arabicPeriod"/>
             </a:pPr>
             <a:r>
-              <a:rPr lang="ko-KR" altLang="en-US" smtClean="0"/>
+              <a:rPr lang="ko-KR" altLang="en-US" dirty="0"/>
               <a:t>모범 택시</a:t>
             </a:r>
-            <a:endParaRPr lang="ko-KR" altLang="en-US"/>
+            <a:endParaRPr lang="en-US" altLang="ko-KR" dirty="0"/>
+          </a:p>
+          <a:p>
+            <a:pPr marL="514350" indent="-514350">
+              <a:buFont typeface="+mj-lt"/>
+              <a:buAutoNum type="arabicPeriod"/>
+            </a:pPr>
+            <a:r>
+              <a:rPr lang="ko-KR" altLang="en-US" dirty="0"/>
+              <a:t>블랙 미러</a:t>
+            </a:r>
+            <a:endParaRPr lang="en-US" altLang="ko-KR" dirty="0"/>
+          </a:p>
+          <a:p>
+            <a:pPr marL="514350" indent="-514350">
+              <a:buFont typeface="+mj-lt"/>
+              <a:buAutoNum type="arabicPeriod"/>
+            </a:pPr>
+            <a:r>
+              <a:rPr lang="ko-KR" altLang="en-US" dirty="0"/>
+              <a:t>러브</a:t>
+            </a:r>
+            <a:r>
+              <a:rPr lang="en-US" altLang="ko-KR" dirty="0"/>
+              <a:t>, </a:t>
+            </a:r>
+            <a:r>
+              <a:rPr lang="ko-KR" altLang="en-US" dirty="0" err="1"/>
+              <a:t>데스</a:t>
+            </a:r>
+            <a:r>
+              <a:rPr lang="ko-KR" altLang="en-US" dirty="0"/>
+              <a:t> </a:t>
+            </a:r>
+            <a:r>
+              <a:rPr lang="en-US" altLang="ko-KR" dirty="0"/>
+              <a:t>+ </a:t>
+            </a:r>
+            <a:r>
+              <a:rPr lang="ko-KR" altLang="en-US" dirty="0"/>
+              <a:t>로봇</a:t>
+            </a:r>
+            <a:endParaRPr lang="en-US" altLang="ko-KR" dirty="0"/>
+          </a:p>
+          <a:p>
+            <a:pPr marL="514350" indent="-514350">
+              <a:buFont typeface="+mj-lt"/>
+              <a:buAutoNum type="arabicPeriod"/>
+            </a:pPr>
+            <a:r>
+              <a:rPr lang="ko-KR" altLang="en-US" dirty="0"/>
+              <a:t>눈물의 여왕</a:t>
+            </a:r>
+            <a:endParaRPr lang="en-US" altLang="ko-KR" dirty="0"/>
+          </a:p>
+          <a:p>
+            <a:pPr marL="514350" indent="-514350">
+              <a:buFont typeface="+mj-lt"/>
+              <a:buAutoNum type="arabicPeriod"/>
+            </a:pPr>
+            <a:r>
+              <a:rPr lang="ko-KR" altLang="en-US" dirty="0"/>
+              <a:t>환혼</a:t>
+            </a:r>
+            <a:endParaRPr lang="en-US" altLang="ko-KR" dirty="0"/>
+          </a:p>
+          <a:p>
+            <a:pPr marL="514350" indent="-514350">
+              <a:buFont typeface="+mj-lt"/>
+              <a:buAutoNum type="arabicPeriod"/>
+            </a:pPr>
+            <a:r>
+              <a:rPr lang="ko-KR" altLang="en-US" dirty="0" err="1"/>
+              <a:t>웬즈데이</a:t>
+            </a:r>
+            <a:endParaRPr lang="en-US" altLang="ko-KR" dirty="0"/>
+          </a:p>
+          <a:p>
+            <a:pPr marL="514350" indent="-514350">
+              <a:buFont typeface="+mj-lt"/>
+              <a:buAutoNum type="arabicPeriod"/>
+            </a:pPr>
+            <a:endParaRPr lang="en-US" altLang="ko-KR" dirty="0"/>
+          </a:p>
+          <a:p>
+            <a:pPr marL="514350" indent="-514350">
+              <a:buFont typeface="+mj-lt"/>
+              <a:buAutoNum type="arabicPeriod"/>
+            </a:pPr>
+            <a:endParaRPr lang="ko-KR" altLang="en-US" dirty="0"/>
           </a:p>
         </p:txBody>
       </p:sp>
@@ -3944,7 +3983,13 @@
   <p:cSld>
     <p:spTree>
       <p:nvGrpSpPr>
-        <p:cNvPr id="1" name=""/>
+        <p:cNvPr id="1" name="">
+          <a:extLst>
+            <a:ext uri="{FF2B5EF4-FFF2-40B4-BE49-F238E27FC236}">
+              <a16:creationId xmlns:a16="http://schemas.microsoft.com/office/drawing/2014/main" id="{9FB268BE-BADE-DA47-71A4-758693343978}"/>
+            </a:ext>
+          </a:extLst>
+        </p:cNvPr>
         <p:cNvGrpSpPr/>
         <p:nvPr/>
       </p:nvGrpSpPr>
@@ -3958,7 +4003,13 @@
       </p:grpSpPr>
       <p:sp>
         <p:nvSpPr>
-          <p:cNvPr id="2" name="제목 1"/>
+          <p:cNvPr id="2" name="제목 1">
+            <a:extLst>
+              <a:ext uri="{FF2B5EF4-FFF2-40B4-BE49-F238E27FC236}">
+                <a16:creationId xmlns:a16="http://schemas.microsoft.com/office/drawing/2014/main" id="{D3BC94FE-534C-D8BD-04DF-31ADE0317C5B}"/>
+              </a:ext>
+            </a:extLst>
+          </p:cNvPr>
           <p:cNvSpPr>
             <a:spLocks noGrp="1"/>
           </p:cNvSpPr>
@@ -3972,24 +4023,29 @@
           <a:lstStyle/>
           <a:p>
             <a:r>
-              <a:rPr lang="ko-KR" altLang="en-US" smtClean="0"/>
+              <a:rPr lang="ko-KR" altLang="en-US" dirty="0"/>
               <a:t>나만의 라이브러리 </a:t>
             </a:r>
             <a:r>
-              <a:rPr lang="en-US" altLang="ko-KR" smtClean="0"/>
+              <a:rPr lang="en-US" altLang="ko-KR" dirty="0"/>
               <a:t>- </a:t>
             </a:r>
             <a:r>
-              <a:rPr lang="ko-KR" altLang="en-US" smtClean="0"/>
-              <a:t>영화</a:t>
-            </a:r>
-            <a:endParaRPr lang="ko-KR" altLang="en-US"/>
-          </a:p>
-        </p:txBody>
-      </p:sp>
-      <p:sp>
-        <p:nvSpPr>
-          <p:cNvPr id="3" name="내용 개체 틀 2"/>
+              <a:rPr lang="ko-KR" altLang="en-US" dirty="0"/>
+              <a:t>애니메이션</a:t>
+            </a:r>
+          </a:p>
+        </p:txBody>
+      </p:sp>
+      <p:sp>
+        <p:nvSpPr>
+          <p:cNvPr id="3" name="내용 개체 틀 2">
+            <a:extLst>
+              <a:ext uri="{FF2B5EF4-FFF2-40B4-BE49-F238E27FC236}">
+                <a16:creationId xmlns:a16="http://schemas.microsoft.com/office/drawing/2014/main" id="{981931E5-04AE-E47E-FA42-8A28F54E68CC}"/>
+              </a:ext>
+            </a:extLst>
+          </p:cNvPr>
           <p:cNvSpPr>
             <a:spLocks noGrp="1"/>
           </p:cNvSpPr>
@@ -3999,7 +4055,9 @@
         </p:nvSpPr>
         <p:spPr/>
         <p:txBody>
-          <a:bodyPr/>
+          <a:bodyPr>
+            <a:normAutofit fontScale="92500" lnSpcReduction="20000"/>
+          </a:bodyPr>
           <a:lstStyle/>
           <a:p>
             <a:pPr marL="514350" indent="-514350">
@@ -4007,10 +4065,14 @@
               <a:buAutoNum type="arabicPeriod"/>
             </a:pPr>
             <a:r>
-              <a:rPr lang="ko-KR" altLang="en-US" smtClean="0"/>
-              <a:t>코코</a:t>
-            </a:r>
-            <a:endParaRPr lang="en-US" altLang="ko-KR" smtClean="0"/>
+              <a:rPr lang="ko-KR" altLang="en-US" dirty="0"/>
+              <a:t>나 혼자만 </a:t>
+            </a:r>
+            <a:r>
+              <a:rPr lang="ko-KR" altLang="en-US" dirty="0" err="1"/>
+              <a:t>레벨업</a:t>
+            </a:r>
+            <a:endParaRPr lang="en-US" altLang="ko-KR" dirty="0"/>
           </a:p>
           <a:p>
             <a:pPr marL="514350" indent="-514350">
@@ -4018,10 +4080,14 @@
               <a:buAutoNum type="arabicPeriod"/>
             </a:pPr>
             <a:r>
-              <a:rPr lang="ko-KR" altLang="en-US" smtClean="0"/>
-              <a:t>레디플레이어원</a:t>
-            </a:r>
-            <a:endParaRPr lang="en-US" altLang="ko-KR" smtClean="0"/>
+              <a:rPr lang="ko-KR" altLang="en-US" dirty="0" err="1"/>
+              <a:t>귀멸의</a:t>
+            </a:r>
+            <a:r>
+              <a:rPr lang="ko-KR" altLang="en-US" dirty="0"/>
+              <a:t> 칼날</a:t>
+            </a:r>
+            <a:endParaRPr lang="en-US" altLang="ko-KR" dirty="0"/>
           </a:p>
           <a:p>
             <a:pPr marL="514350" indent="-514350">
@@ -4029,32 +4095,119 @@
               <a:buAutoNum type="arabicPeriod"/>
             </a:pPr>
             <a:r>
-              <a:rPr lang="ko-KR" altLang="en-US" smtClean="0"/>
-              <a:t>신과 함께 </a:t>
-            </a:r>
-            <a:r>
-              <a:rPr lang="en-US" altLang="ko-KR" smtClean="0"/>
-              <a:t>– </a:t>
-            </a:r>
-            <a:r>
-              <a:rPr lang="ko-KR" altLang="en-US" smtClean="0"/>
-              <a:t>인과 연</a:t>
-            </a:r>
-            <a:endParaRPr lang="en-US" altLang="ko-KR" smtClean="0"/>
+              <a:rPr lang="ko-KR" altLang="en-US" dirty="0"/>
+              <a:t>진격의 거인</a:t>
+            </a:r>
+            <a:endParaRPr lang="en-US" altLang="ko-KR" dirty="0"/>
           </a:p>
           <a:p>
             <a:pPr marL="514350" indent="-514350">
               <a:buFont typeface="+mj-lt"/>
               <a:buAutoNum type="arabicPeriod"/>
             </a:pPr>
-            <a:endParaRPr lang="ko-KR" altLang="en-US"/>
+            <a:r>
+              <a:rPr lang="ko-KR" altLang="en-US" dirty="0"/>
+              <a:t>코난</a:t>
+            </a:r>
+            <a:endParaRPr lang="en-US" altLang="ko-KR" dirty="0"/>
+          </a:p>
+          <a:p>
+            <a:pPr marL="514350" indent="-514350">
+              <a:buFont typeface="+mj-lt"/>
+              <a:buAutoNum type="arabicPeriod"/>
+            </a:pPr>
+            <a:r>
+              <a:rPr lang="ko-KR" altLang="en-US" dirty="0" err="1"/>
+              <a:t>지옥락</a:t>
+            </a:r>
+            <a:endParaRPr lang="en-US" altLang="ko-KR" dirty="0"/>
+          </a:p>
+          <a:p>
+            <a:pPr marL="514350" indent="-514350">
+              <a:buFont typeface="+mj-lt"/>
+              <a:buAutoNum type="arabicPeriod"/>
+            </a:pPr>
+            <a:r>
+              <a:rPr lang="ko-KR" altLang="en-US" dirty="0" err="1"/>
+              <a:t>던전밥</a:t>
+            </a:r>
+            <a:endParaRPr lang="en-US" altLang="ko-KR" dirty="0"/>
+          </a:p>
+          <a:p>
+            <a:pPr marL="514350" indent="-514350">
+              <a:buFont typeface="+mj-lt"/>
+              <a:buAutoNum type="arabicPeriod"/>
+            </a:pPr>
+            <a:r>
+              <a:rPr lang="ko-KR" altLang="en-US" dirty="0" err="1"/>
+              <a:t>원펀맨</a:t>
+            </a:r>
+            <a:endParaRPr lang="en-US" altLang="ko-KR" dirty="0"/>
+          </a:p>
+          <a:p>
+            <a:pPr marL="514350" indent="-514350">
+              <a:buFont typeface="+mj-lt"/>
+              <a:buAutoNum type="arabicPeriod"/>
+            </a:pPr>
+            <a:r>
+              <a:rPr lang="ko-KR" altLang="en-US" dirty="0"/>
+              <a:t>소년탐정 김전일</a:t>
+            </a:r>
+            <a:endParaRPr lang="en-US" altLang="ko-KR" dirty="0"/>
+          </a:p>
+          <a:p>
+            <a:pPr marL="514350" indent="-514350">
+              <a:buFont typeface="+mj-lt"/>
+              <a:buAutoNum type="arabicPeriod"/>
+            </a:pPr>
+            <a:r>
+              <a:rPr lang="ko-KR" altLang="en-US" dirty="0"/>
+              <a:t>극장판 짱구는 </a:t>
+            </a:r>
+            <a:r>
+              <a:rPr lang="ko-KR" altLang="en-US" dirty="0" err="1"/>
+              <a:t>못말려</a:t>
+            </a:r>
+            <a:endParaRPr lang="en-US" altLang="ko-KR" dirty="0"/>
+          </a:p>
+          <a:p>
+            <a:pPr marL="514350" indent="-514350">
+              <a:buFont typeface="+mj-lt"/>
+              <a:buAutoNum type="arabicPeriod"/>
+            </a:pPr>
+            <a:r>
+              <a:rPr lang="ko-KR" altLang="en-US" dirty="0"/>
+              <a:t>트롤</a:t>
+            </a:r>
+            <a:endParaRPr lang="en-US" altLang="ko-KR" dirty="0"/>
+          </a:p>
+          <a:p>
+            <a:pPr marL="514350" indent="-514350">
+              <a:buFont typeface="+mj-lt"/>
+              <a:buAutoNum type="arabicPeriod"/>
+            </a:pPr>
+            <a:endParaRPr lang="en-US" altLang="ko-KR" dirty="0"/>
+          </a:p>
+          <a:p>
+            <a:pPr marL="514350" indent="-514350">
+              <a:buFont typeface="+mj-lt"/>
+              <a:buAutoNum type="arabicPeriod"/>
+            </a:pPr>
+            <a:endParaRPr lang="en-US" altLang="ko-KR" dirty="0"/>
+          </a:p>
+          <a:p>
+            <a:pPr marL="514350" indent="-514350">
+              <a:buFont typeface="+mj-lt"/>
+              <a:buAutoNum type="arabicPeriod"/>
+            </a:pPr>
+            <a:endParaRPr lang="ko-KR" altLang="en-US" dirty="0"/>
           </a:p>
         </p:txBody>
       </p:sp>
     </p:spTree>
     <p:extLst>
       <p:ext uri="{BB962C8B-B14F-4D97-AF65-F5344CB8AC3E}">
-        <p14:creationId xmlns:p14="http://schemas.microsoft.com/office/powerpoint/2010/main" val="1051746249"/>
+        <p14:creationId xmlns:p14="http://schemas.microsoft.com/office/powerpoint/2010/main" val="3944749689"/>
       </p:ext>
     </p:extLst>
   </p:cSld>
@@ -4097,18 +4250,17 @@
           <a:lstStyle/>
           <a:p>
             <a:r>
-              <a:rPr lang="ko-KR" altLang="en-US" smtClean="0"/>
+              <a:rPr lang="ko-KR" altLang="en-US"/>
               <a:t>나만의 라이브러리 </a:t>
             </a:r>
             <a:r>
-              <a:rPr lang="en-US" altLang="ko-KR" smtClean="0"/>
+              <a:rPr lang="en-US" altLang="ko-KR"/>
               <a:t>- </a:t>
             </a:r>
             <a:r>
-              <a:rPr lang="ko-KR" altLang="en-US" smtClean="0"/>
-              <a:t>음악</a:t>
-            </a:r>
-            <a:endParaRPr lang="ko-KR" altLang="en-US"/>
+              <a:rPr lang="ko-KR" altLang="en-US"/>
+              <a:t>영화</a:t>
+            </a:r>
           </a:p>
         </p:txBody>
       </p:sp>
@@ -4132,9 +4284,10 @@
               <a:buAutoNum type="arabicPeriod"/>
             </a:pPr>
             <a:r>
-              <a:rPr lang="en-US" altLang="ko-KR" smtClean="0"/>
-              <a:t>You are a miracle</a:t>
-            </a:r>
+              <a:rPr lang="ko-KR" altLang="en-US" dirty="0" err="1"/>
+              <a:t>코코</a:t>
+            </a:r>
+            <a:endParaRPr lang="en-US" altLang="ko-KR" dirty="0"/>
           </a:p>
           <a:p>
             <a:pPr marL="514350" indent="-514350">
@@ -4142,10 +4295,10 @@
               <a:buAutoNum type="arabicPeriod"/>
             </a:pPr>
             <a:r>
-              <a:rPr lang="ko-KR" altLang="en-US" smtClean="0"/>
-              <a:t>피터팬</a:t>
-            </a:r>
-            <a:endParaRPr lang="en-US" altLang="ko-KR" smtClean="0"/>
+              <a:rPr lang="ko-KR" altLang="en-US" dirty="0" err="1"/>
+              <a:t>레디플레이어원</a:t>
+            </a:r>
+            <a:endParaRPr lang="en-US" altLang="ko-KR" dirty="0"/>
           </a:p>
           <a:p>
             <a:pPr marL="514350" indent="-514350">
@@ -4153,23 +4306,96 @@
               <a:buAutoNum type="arabicPeriod"/>
             </a:pPr>
             <a:r>
-              <a:rPr lang="en-US" altLang="ko-KR" smtClean="0"/>
-              <a:t>Broken Melodies</a:t>
-            </a:r>
+              <a:rPr lang="ko-KR" altLang="en-US" dirty="0"/>
+              <a:t>신과 함께 </a:t>
+            </a:r>
+            <a:r>
+              <a:rPr lang="en-US" altLang="ko-KR" dirty="0"/>
+              <a:t>– </a:t>
+            </a:r>
+            <a:r>
+              <a:rPr lang="ko-KR" altLang="en-US" dirty="0"/>
+              <a:t>인과 연</a:t>
+            </a:r>
+            <a:endParaRPr lang="en-US" altLang="ko-KR" dirty="0"/>
           </a:p>
           <a:p>
             <a:pPr marL="514350" indent="-514350">
               <a:buFont typeface="+mj-lt"/>
               <a:buAutoNum type="arabicPeriod"/>
             </a:pPr>
-            <a:endParaRPr lang="ko-KR" altLang="en-US"/>
+            <a:r>
+              <a:rPr lang="ko-KR" altLang="en-US" dirty="0" err="1"/>
+              <a:t>에놀라</a:t>
+            </a:r>
+            <a:r>
+              <a:rPr lang="ko-KR" altLang="en-US" dirty="0"/>
+              <a:t> 홈즈</a:t>
+            </a:r>
+            <a:endParaRPr lang="en-US" altLang="ko-KR" dirty="0"/>
+          </a:p>
+          <a:p>
+            <a:pPr marL="514350" indent="-514350">
+              <a:buFont typeface="+mj-lt"/>
+              <a:buAutoNum type="arabicPeriod"/>
+            </a:pPr>
+            <a:r>
+              <a:rPr lang="ko-KR" altLang="en-US" dirty="0" err="1"/>
+              <a:t>나이브스</a:t>
+            </a:r>
+            <a:r>
+              <a:rPr lang="ko-KR" altLang="en-US" dirty="0"/>
+              <a:t> 아웃</a:t>
+            </a:r>
+            <a:endParaRPr lang="en-US" altLang="ko-KR" dirty="0"/>
+          </a:p>
+          <a:p>
+            <a:pPr marL="514350" indent="-514350">
+              <a:buFont typeface="+mj-lt"/>
+              <a:buAutoNum type="arabicPeriod"/>
+            </a:pPr>
+            <a:r>
+              <a:rPr lang="ko-KR" altLang="en-US" dirty="0"/>
+              <a:t>신비한 동물 사전</a:t>
+            </a:r>
+            <a:endParaRPr lang="en-US" altLang="ko-KR" dirty="0"/>
+          </a:p>
+          <a:p>
+            <a:pPr marL="514350" indent="-514350">
+              <a:buFont typeface="+mj-lt"/>
+              <a:buAutoNum type="arabicPeriod"/>
+            </a:pPr>
+            <a:r>
+              <a:rPr lang="ko-KR" altLang="en-US" dirty="0"/>
+              <a:t>드래곤 퀘스트</a:t>
+            </a:r>
+            <a:r>
+              <a:rPr lang="en-US" altLang="ko-KR" dirty="0"/>
+              <a:t>: </a:t>
+            </a:r>
+            <a:r>
+              <a:rPr lang="ko-KR" altLang="en-US" dirty="0" err="1"/>
+              <a:t>유어</a:t>
+            </a:r>
+            <a:r>
+              <a:rPr lang="ko-KR" altLang="en-US" dirty="0"/>
+              <a:t> 스토리</a:t>
+            </a:r>
+            <a:endParaRPr lang="en-US" altLang="ko-KR" dirty="0"/>
+          </a:p>
+          <a:p>
+            <a:pPr marL="514350" indent="-514350">
+              <a:buFont typeface="+mj-lt"/>
+              <a:buAutoNum type="arabicPeriod"/>
+            </a:pPr>
+            <a:endParaRPr lang="ko-KR" altLang="en-US" dirty="0"/>
           </a:p>
         </p:txBody>
       </p:sp>
     </p:spTree>
     <p:extLst>
       <p:ext uri="{BB962C8B-B14F-4D97-AF65-F5344CB8AC3E}">
-        <p14:creationId xmlns:p14="http://schemas.microsoft.com/office/powerpoint/2010/main" val="2313469024"/>
+        <p14:creationId xmlns:p14="http://schemas.microsoft.com/office/powerpoint/2010/main" val="1051746249"/>
       </p:ext>
     </p:extLst>
   </p:cSld>
@@ -4212,10 +4438,17 @@
           <a:lstStyle/>
           <a:p>
             <a:r>
-              <a:rPr lang="ko-KR" altLang="en-US" smtClean="0"/>
-              <a:t>분야별로 리스트화</a:t>
-            </a:r>
-            <a:endParaRPr lang="ko-KR" altLang="en-US"/>
+              <a:rPr lang="ko-KR" altLang="en-US"/>
+              <a:t>나만의 라이브러리 </a:t>
+            </a:r>
+            <a:r>
+              <a:rPr lang="en-US" altLang="ko-KR"/>
+              <a:t>- </a:t>
+            </a:r>
+            <a:r>
+              <a:rPr lang="ko-KR" altLang="en-US"/>
+              <a:t>음악</a:t>
+            </a:r>
           </a:p>
         </p:txBody>
       </p:sp>
@@ -4234,44 +4467,41 @@
           <a:bodyPr/>
           <a:lstStyle/>
           <a:p>
-            <a:r>
-              <a:rPr lang="ko-KR" altLang="en-US" smtClean="0"/>
-              <a:t>내가 인생작이라고 생각하는 것들에 대한 리스트화</a:t>
-            </a:r>
-            <a:endParaRPr lang="en-US" altLang="ko-KR" smtClean="0"/>
-          </a:p>
-          <a:p>
+            <a:pPr marL="514350" indent="-514350">
+              <a:buFont typeface="+mj-lt"/>
+              <a:buAutoNum type="arabicPeriod"/>
+            </a:pPr>
+            <a:r>
+              <a:rPr lang="en-US" altLang="ko-KR"/>
+              <a:t>You are a miracle</a:t>
+            </a:r>
+          </a:p>
+          <a:p>
+            <a:pPr marL="514350" indent="-514350">
+              <a:buFont typeface="+mj-lt"/>
+              <a:buAutoNum type="arabicPeriod"/>
+            </a:pPr>
+            <a:r>
+              <a:rPr lang="ko-KR" altLang="en-US"/>
+              <a:t>피터팬</a:t>
+            </a:r>
             <a:endParaRPr lang="en-US" altLang="ko-KR"/>
           </a:p>
           <a:p>
-            <a:r>
-              <a:rPr lang="ko-KR" altLang="en-US" smtClean="0"/>
-              <a:t>이를 통해 내가 무엇을 좋아하는지 알 수 있다</a:t>
-            </a:r>
-            <a:r>
-              <a:rPr lang="en-US" altLang="ko-KR" smtClean="0"/>
-              <a:t>.</a:t>
-            </a:r>
-          </a:p>
-          <a:p>
-            <a:endParaRPr lang="en-US" altLang="ko-KR"/>
-          </a:p>
-          <a:p>
-            <a:r>
-              <a:rPr lang="ko-KR" altLang="en-US" smtClean="0"/>
-              <a:t>내가 좋아하는 게 무엇인지 알면</a:t>
-            </a:r>
-            <a:endParaRPr lang="en-US" altLang="ko-KR" smtClean="0"/>
-          </a:p>
-          <a:p>
-            <a:r>
-              <a:rPr lang="ko-KR" altLang="en-US" smtClean="0"/>
-              <a:t>좋을 글을 쓸 수 있는 바탕이 된다</a:t>
-            </a:r>
-            <a:r>
-              <a:rPr lang="en-US" altLang="ko-KR" smtClean="0"/>
-              <a:t>.</a:t>
-            </a:r>
+            <a:pPr marL="514350" indent="-514350">
+              <a:buFont typeface="+mj-lt"/>
+              <a:buAutoNum type="arabicPeriod"/>
+            </a:pPr>
+            <a:r>
+              <a:rPr lang="en-US" altLang="ko-KR"/>
+              <a:t>Broken Melodies</a:t>
+            </a:r>
+          </a:p>
+          <a:p>
+            <a:pPr marL="514350" indent="-514350">
+              <a:buFont typeface="+mj-lt"/>
+              <a:buAutoNum type="arabicPeriod"/>
+            </a:pPr>
             <a:endParaRPr lang="ko-KR" altLang="en-US"/>
           </a:p>
         </p:txBody>
@@ -4279,7 +4509,7 @@
     </p:spTree>
     <p:extLst>
       <p:ext uri="{BB962C8B-B14F-4D97-AF65-F5344CB8AC3E}">
-        <p14:creationId xmlns:p14="http://schemas.microsoft.com/office/powerpoint/2010/main" val="774339752"/>
+        <p14:creationId xmlns:p14="http://schemas.microsoft.com/office/powerpoint/2010/main" val="2313469024"/>
       </p:ext>
     </p:extLst>
   </p:cSld>
@@ -4290,6 +4520,152 @@
 </file>
 
 <file path=ppt/slides/slide18.xml><?xml version="1.0" encoding="utf-8"?>
+<p:sld xmlns:a="http://schemas.openxmlformats.org/drawingml/2006/main" xmlns:r="http://schemas.openxmlformats.org/officeDocument/2006/relationships" xmlns:p="http://schemas.openxmlformats.org/presentationml/2006/main">
+  <p:cSld>
+    <p:spTree>
+      <p:nvGrpSpPr>
+        <p:cNvPr id="1" name="">
+          <a:extLst>
+            <a:ext uri="{FF2B5EF4-FFF2-40B4-BE49-F238E27FC236}">
+              <a16:creationId xmlns:a16="http://schemas.microsoft.com/office/drawing/2014/main" id="{04B44243-247A-7E6E-850E-BDE6C3C1AA11}"/>
+            </a:ext>
+          </a:extLst>
+        </p:cNvPr>
+        <p:cNvGrpSpPr/>
+        <p:nvPr/>
+      </p:nvGrpSpPr>
+      <p:grpSpPr>
+        <a:xfrm>
+          <a:off x="0" y="0"/>
+          <a:ext cx="0" cy="0"/>
+          <a:chOff x="0" y="0"/>
+          <a:chExt cx="0" cy="0"/>
+        </a:xfrm>
+      </p:grpSpPr>
+      <p:sp>
+        <p:nvSpPr>
+          <p:cNvPr id="2" name="제목 1">
+            <a:extLst>
+              <a:ext uri="{FF2B5EF4-FFF2-40B4-BE49-F238E27FC236}">
+                <a16:creationId xmlns:a16="http://schemas.microsoft.com/office/drawing/2014/main" id="{3CE3EE42-8370-F5CE-031E-B1729C893F6B}"/>
+              </a:ext>
+            </a:extLst>
+          </p:cNvPr>
+          <p:cNvSpPr>
+            <a:spLocks noGrp="1"/>
+          </p:cNvSpPr>
+          <p:nvPr>
+            <p:ph type="title"/>
+          </p:nvPr>
+        </p:nvSpPr>
+        <p:spPr/>
+        <p:txBody>
+          <a:bodyPr/>
+          <a:lstStyle/>
+          <a:p>
+            <a:r>
+              <a:rPr lang="ko-KR" altLang="en-US" dirty="0"/>
+              <a:t>나만의 라이브러리 </a:t>
+            </a:r>
+            <a:r>
+              <a:rPr lang="en-US" altLang="ko-KR" dirty="0"/>
+              <a:t>– </a:t>
+            </a:r>
+            <a:r>
+              <a:rPr lang="ko-KR" altLang="en-US" dirty="0"/>
+              <a:t>예능 </a:t>
+            </a:r>
+            <a:r>
+              <a:rPr lang="en-US" altLang="ko-KR" dirty="0"/>
+              <a:t>/ </a:t>
+            </a:r>
+            <a:r>
+              <a:rPr lang="ko-KR" altLang="en-US" dirty="0"/>
+              <a:t>프로그램</a:t>
+            </a:r>
+          </a:p>
+        </p:txBody>
+      </p:sp>
+      <p:sp>
+        <p:nvSpPr>
+          <p:cNvPr id="3" name="내용 개체 틀 2">
+            <a:extLst>
+              <a:ext uri="{FF2B5EF4-FFF2-40B4-BE49-F238E27FC236}">
+                <a16:creationId xmlns:a16="http://schemas.microsoft.com/office/drawing/2014/main" id="{76B52BEB-5045-B3D2-53E3-79AF176BAF94}"/>
+              </a:ext>
+            </a:extLst>
+          </p:cNvPr>
+          <p:cNvSpPr>
+            <a:spLocks noGrp="1"/>
+          </p:cNvSpPr>
+          <p:nvPr>
+            <p:ph idx="1"/>
+          </p:nvPr>
+        </p:nvSpPr>
+        <p:spPr/>
+        <p:txBody>
+          <a:bodyPr/>
+          <a:lstStyle/>
+          <a:p>
+            <a:pPr marL="514350" indent="-514350">
+              <a:buFont typeface="+mj-lt"/>
+              <a:buAutoNum type="arabicPeriod"/>
+            </a:pPr>
+            <a:r>
+              <a:rPr lang="ko-KR" altLang="en-US" dirty="0"/>
+              <a:t>용감한 형사들</a:t>
+            </a:r>
+            <a:endParaRPr lang="en-US" altLang="ko-KR" dirty="0"/>
+          </a:p>
+          <a:p>
+            <a:pPr marL="514350" indent="-514350">
+              <a:buFont typeface="+mj-lt"/>
+              <a:buAutoNum type="arabicPeriod"/>
+            </a:pPr>
+            <a:r>
+              <a:rPr lang="ko-KR" altLang="en-US" dirty="0" err="1"/>
+              <a:t>크라임씬</a:t>
+            </a:r>
+            <a:endParaRPr lang="en-US" altLang="ko-KR" dirty="0"/>
+          </a:p>
+          <a:p>
+            <a:pPr marL="514350" indent="-514350">
+              <a:buFont typeface="+mj-lt"/>
+              <a:buAutoNum type="arabicPeriod"/>
+            </a:pPr>
+            <a:r>
+              <a:rPr lang="ko-KR" altLang="en-US" dirty="0"/>
+              <a:t>미스터리 </a:t>
+            </a:r>
+            <a:r>
+              <a:rPr lang="ko-KR" altLang="en-US" dirty="0" err="1"/>
+              <a:t>수사단</a:t>
+            </a:r>
+            <a:endParaRPr lang="en-US" altLang="ko-KR" dirty="0"/>
+          </a:p>
+          <a:p>
+            <a:pPr marL="514350" indent="-514350">
+              <a:buFont typeface="+mj-lt"/>
+              <a:buAutoNum type="arabicPeriod"/>
+            </a:pPr>
+            <a:endParaRPr lang="ko-KR" altLang="en-US" dirty="0"/>
+          </a:p>
+        </p:txBody>
+      </p:sp>
+    </p:spTree>
+    <p:extLst>
+      <p:ext uri="{BB962C8B-B14F-4D97-AF65-F5344CB8AC3E}">
+        <p14:creationId xmlns:p14="http://schemas.microsoft.com/office/powerpoint/2010/main" val="284855469"/>
+      </p:ext>
+    </p:extLst>
+  </p:cSld>
+  <p:clrMapOvr>
+    <a:masterClrMapping/>
+  </p:clrMapOvr>
+</p:sld>
+</file>
+
+<file path=ppt/slides/slide19.xml><?xml version="1.0" encoding="utf-8"?>
 <p:sld xmlns:a="http://schemas.openxmlformats.org/drawingml/2006/main" xmlns:r="http://schemas.openxmlformats.org/officeDocument/2006/relationships" xmlns:p="http://schemas.openxmlformats.org/presentationml/2006/main">
   <p:cSld>
     <p:spTree>
@@ -4322,51 +4698,63 @@
           <a:lstStyle/>
           <a:p>
             <a:r>
-              <a:rPr lang="ko-KR" altLang="en-US" smtClean="0"/>
-              <a:t>내가 정말 좋아하는 게 뭔지 생각해보자</a:t>
-            </a:r>
-            <a:r>
-              <a:rPr lang="en-US" altLang="ko-KR" smtClean="0"/>
+              <a:rPr lang="ko-KR" altLang="en-US"/>
+              <a:t>분야별로 리스트화</a:t>
+            </a:r>
+          </a:p>
+        </p:txBody>
+      </p:sp>
+      <p:sp>
+        <p:nvSpPr>
+          <p:cNvPr id="3" name="내용 개체 틀 2"/>
+          <p:cNvSpPr>
+            <a:spLocks noGrp="1"/>
+          </p:cNvSpPr>
+          <p:nvPr>
+            <p:ph idx="1"/>
+          </p:nvPr>
+        </p:nvSpPr>
+        <p:spPr/>
+        <p:txBody>
+          <a:bodyPr/>
+          <a:lstStyle/>
+          <a:p>
+            <a:r>
+              <a:rPr lang="ko-KR" altLang="en-US"/>
+              <a:t>내가 인생작이라고 생각하는 것들에 대한 리스트화</a:t>
+            </a:r>
+            <a:endParaRPr lang="en-US" altLang="ko-KR"/>
+          </a:p>
+          <a:p>
+            <a:endParaRPr lang="en-US" altLang="ko-KR"/>
+          </a:p>
+          <a:p>
+            <a:r>
+              <a:rPr lang="ko-KR" altLang="en-US"/>
+              <a:t>이를 통해 내가 무엇을 좋아하는지 알 수 있다</a:t>
+            </a:r>
+            <a:r>
+              <a:rPr lang="en-US" altLang="ko-KR"/>
               <a:t>.</a:t>
             </a:r>
-            <a:endParaRPr lang="ko-KR" altLang="en-US"/>
-          </a:p>
-        </p:txBody>
-      </p:sp>
-      <p:sp>
-        <p:nvSpPr>
-          <p:cNvPr id="3" name="내용 개체 틀 2"/>
-          <p:cNvSpPr>
-            <a:spLocks noGrp="1"/>
-          </p:cNvSpPr>
-          <p:nvPr>
-            <p:ph idx="1"/>
-          </p:nvPr>
-        </p:nvSpPr>
-        <p:spPr/>
-        <p:txBody>
-          <a:bodyPr/>
-          <a:lstStyle/>
-          <a:p>
-            <a:r>
-              <a:rPr lang="ko-KR" altLang="en-US" smtClean="0"/>
-              <a:t>내가 좋아하는 것들에 관해 쓸 때는 더 잘 쓸 수 있다</a:t>
-            </a:r>
-            <a:r>
-              <a:rPr lang="en-US" altLang="ko-KR" smtClean="0"/>
-              <a:t>.</a:t>
-            </a:r>
           </a:p>
           <a:p>
             <a:endParaRPr lang="en-US" altLang="ko-KR"/>
           </a:p>
           <a:p>
             <a:r>
-              <a:rPr lang="ko-KR" altLang="en-US" smtClean="0"/>
-              <a:t>객관적으로 내가 무엇을 좋아하는 지에 대해 인식하자</a:t>
-            </a:r>
-            <a:r>
-              <a:rPr lang="en-US" altLang="ko-KR" smtClean="0"/>
+              <a:rPr lang="ko-KR" altLang="en-US"/>
+              <a:t>내가 좋아하는 게 무엇인지 알면</a:t>
+            </a:r>
+            <a:endParaRPr lang="en-US" altLang="ko-KR"/>
+          </a:p>
+          <a:p>
+            <a:r>
+              <a:rPr lang="ko-KR" altLang="en-US"/>
+              <a:t>좋을 글을 쓸 수 있는 바탕이 된다</a:t>
+            </a:r>
+            <a:r>
+              <a:rPr lang="en-US" altLang="ko-KR"/>
               <a:t>.</a:t>
             </a:r>
             <a:endParaRPr lang="ko-KR" altLang="en-US"/>
@@ -4376,7 +4764,7 @@
     </p:spTree>
     <p:extLst>
       <p:ext uri="{BB962C8B-B14F-4D97-AF65-F5344CB8AC3E}">
-        <p14:creationId xmlns:p14="http://schemas.microsoft.com/office/powerpoint/2010/main" val="3131568533"/>
+        <p14:creationId xmlns:p14="http://schemas.microsoft.com/office/powerpoint/2010/main" val="774339752"/>
       </p:ext>
     </p:extLst>
   </p:cSld>
@@ -4440,6 +4828,103 @@
 </p:sld>
 </file>
 
+<file path=ppt/slides/slide20.xml><?xml version="1.0" encoding="utf-8"?>
+<p:sld xmlns:a="http://schemas.openxmlformats.org/drawingml/2006/main" xmlns:r="http://schemas.openxmlformats.org/officeDocument/2006/relationships" xmlns:p="http://schemas.openxmlformats.org/presentationml/2006/main">
+  <p:cSld>
+    <p:spTree>
+      <p:nvGrpSpPr>
+        <p:cNvPr id="1" name=""/>
+        <p:cNvGrpSpPr/>
+        <p:nvPr/>
+      </p:nvGrpSpPr>
+      <p:grpSpPr>
+        <a:xfrm>
+          <a:off x="0" y="0"/>
+          <a:ext cx="0" cy="0"/>
+          <a:chOff x="0" y="0"/>
+          <a:chExt cx="0" cy="0"/>
+        </a:xfrm>
+      </p:grpSpPr>
+      <p:sp>
+        <p:nvSpPr>
+          <p:cNvPr id="2" name="제목 1"/>
+          <p:cNvSpPr>
+            <a:spLocks noGrp="1"/>
+          </p:cNvSpPr>
+          <p:nvPr>
+            <p:ph type="title"/>
+          </p:nvPr>
+        </p:nvSpPr>
+        <p:spPr/>
+        <p:txBody>
+          <a:bodyPr/>
+          <a:lstStyle/>
+          <a:p>
+            <a:r>
+              <a:rPr lang="ko-KR" altLang="en-US"/>
+              <a:t>내가 정말 좋아하는 게 뭔지 생각해보자</a:t>
+            </a:r>
+            <a:r>
+              <a:rPr lang="en-US" altLang="ko-KR"/>
+              <a:t>.</a:t>
+            </a:r>
+            <a:endParaRPr lang="ko-KR" altLang="en-US"/>
+          </a:p>
+        </p:txBody>
+      </p:sp>
+      <p:sp>
+        <p:nvSpPr>
+          <p:cNvPr id="3" name="내용 개체 틀 2"/>
+          <p:cNvSpPr>
+            <a:spLocks noGrp="1"/>
+          </p:cNvSpPr>
+          <p:nvPr>
+            <p:ph idx="1"/>
+          </p:nvPr>
+        </p:nvSpPr>
+        <p:spPr/>
+        <p:txBody>
+          <a:bodyPr/>
+          <a:lstStyle/>
+          <a:p>
+            <a:r>
+              <a:rPr lang="ko-KR" altLang="en-US"/>
+              <a:t>내가 좋아하는 것들에 관해 쓸 때는 더 잘 쓸 수 있다</a:t>
+            </a:r>
+            <a:r>
+              <a:rPr lang="en-US" altLang="ko-KR"/>
+              <a:t>.</a:t>
+            </a:r>
+          </a:p>
+          <a:p>
+            <a:endParaRPr lang="en-US" altLang="ko-KR"/>
+          </a:p>
+          <a:p>
+            <a:r>
+              <a:rPr lang="ko-KR" altLang="en-US"/>
+              <a:t>객관적으로 내가 무엇을 좋아하는 지에 대해 인식하자</a:t>
+            </a:r>
+            <a:r>
+              <a:rPr lang="en-US" altLang="ko-KR"/>
+              <a:t>.</a:t>
+            </a:r>
+            <a:endParaRPr lang="ko-KR" altLang="en-US"/>
+          </a:p>
+        </p:txBody>
+      </p:sp>
+    </p:spTree>
+    <p:extLst>
+      <p:ext uri="{BB962C8B-B14F-4D97-AF65-F5344CB8AC3E}">
+        <p14:creationId xmlns:p14="http://schemas.microsoft.com/office/powerpoint/2010/main" val="3131568533"/>
+      </p:ext>
+    </p:extLst>
+  </p:cSld>
+  <p:clrMapOvr>
+    <a:masterClrMapping/>
+  </p:clrMapOvr>
+</p:sld>
+</file>
+
 <file path=ppt/slides/slide3.xml><?xml version="1.0" encoding="utf-8"?>
 <p:sld xmlns:a="http://schemas.openxmlformats.org/drawingml/2006/main" xmlns:r="http://schemas.openxmlformats.org/officeDocument/2006/relationships" xmlns:p="http://schemas.openxmlformats.org/presentationml/2006/main">
   <p:cSld>
@@ -4473,26 +4958,25 @@
           <a:lstStyle/>
           <a:p>
             <a:r>
-              <a:rPr lang="ko-KR" altLang="en-US" smtClean="0"/>
+              <a:rPr lang="ko-KR" altLang="en-US"/>
               <a:t>삼국지 </a:t>
             </a:r>
             <a:r>
-              <a:rPr lang="en-US" altLang="ko-KR" smtClean="0"/>
+              <a:rPr lang="en-US" altLang="ko-KR"/>
               <a:t>– </a:t>
             </a:r>
             <a:r>
-              <a:rPr lang="ko-KR" altLang="en-US" smtClean="0"/>
+              <a:rPr lang="ko-KR" altLang="en-US"/>
               <a:t>위정자</a:t>
             </a:r>
             <a:r>
-              <a:rPr lang="en-US" altLang="ko-KR" smtClean="0"/>
+              <a:rPr lang="en-US" altLang="ko-KR"/>
               <a:t>/</a:t>
             </a:r>
             <a:r>
-              <a:rPr lang="ko-KR" altLang="en-US" smtClean="0"/>
+              <a:rPr lang="ko-KR" altLang="en-US"/>
               <a:t>군주의 길</a:t>
             </a:r>
-            <a:endParaRPr lang="ko-KR" altLang="en-US"/>
           </a:p>
         </p:txBody>
       </p:sp>
@@ -4512,48 +4996,47 @@
           <a:lstStyle/>
           <a:p>
             <a:r>
-              <a:rPr lang="ko-KR" altLang="en-US" smtClean="0"/>
+              <a:rPr lang="ko-KR" altLang="en-US"/>
               <a:t>위나라 조조 </a:t>
             </a:r>
             <a:r>
-              <a:rPr lang="en-US" altLang="ko-KR" smtClean="0"/>
+              <a:rPr lang="en-US" altLang="ko-KR"/>
               <a:t>– </a:t>
             </a:r>
             <a:r>
-              <a:rPr lang="ko-KR" altLang="en-US" smtClean="0"/>
+              <a:rPr lang="ko-KR" altLang="en-US"/>
               <a:t>학연과 지연보다 능력에 따라 인재를 등용</a:t>
             </a:r>
-            <a:endParaRPr lang="en-US" altLang="ko-KR" smtClean="0"/>
-          </a:p>
-          <a:p>
-            <a:r>
-              <a:rPr lang="ko-KR" altLang="en-US" smtClean="0"/>
+            <a:endParaRPr lang="en-US" altLang="ko-KR"/>
+          </a:p>
+          <a:p>
+            <a:r>
+              <a:rPr lang="ko-KR" altLang="en-US"/>
               <a:t>촉나라 유비 </a:t>
             </a:r>
             <a:r>
-              <a:rPr lang="en-US" altLang="ko-KR" smtClean="0"/>
+              <a:rPr lang="en-US" altLang="ko-KR"/>
               <a:t>– </a:t>
             </a:r>
             <a:r>
-              <a:rPr lang="ko-KR" altLang="en-US" smtClean="0"/>
+              <a:rPr lang="ko-KR" altLang="en-US"/>
               <a:t>인의에 의한 위민의 정치</a:t>
             </a:r>
-            <a:endParaRPr lang="en-US" altLang="ko-KR" smtClean="0"/>
-          </a:p>
-          <a:p>
-            <a:r>
-              <a:rPr lang="ko-KR" altLang="en-US" smtClean="0"/>
+            <a:endParaRPr lang="en-US" altLang="ko-KR"/>
+          </a:p>
+          <a:p>
+            <a:r>
+              <a:rPr lang="ko-KR" altLang="en-US"/>
               <a:t>오나라 손권 </a:t>
             </a:r>
             <a:r>
-              <a:rPr lang="en-US" altLang="ko-KR" smtClean="0"/>
+              <a:rPr lang="en-US" altLang="ko-KR"/>
               <a:t>– 3</a:t>
             </a:r>
             <a:r>
-              <a:rPr lang="ko-KR" altLang="en-US" smtClean="0"/>
+              <a:rPr lang="ko-KR" altLang="en-US"/>
               <a:t>대를 걸친 뜻에 충신들이 따름</a:t>
             </a:r>
-            <a:endParaRPr lang="ko-KR" altLang="en-US"/>
           </a:p>
         </p:txBody>
       </p:sp>
@@ -4603,10 +5086,9 @@
           <a:lstStyle/>
           <a:p>
             <a:r>
-              <a:rPr lang="ko-KR" altLang="en-US" smtClean="0"/>
+              <a:rPr lang="ko-KR" altLang="en-US"/>
               <a:t>출사표</a:t>
             </a:r>
-            <a:endParaRPr lang="ko-KR" altLang="en-US"/>
           </a:p>
         </p:txBody>
       </p:sp>
@@ -4626,19 +5108,19 @@
           <a:lstStyle/>
           <a:p>
             <a:r>
-              <a:rPr lang="ko-KR" altLang="en-US" smtClean="0"/>
+              <a:rPr lang="ko-KR" altLang="en-US"/>
               <a:t>출사표의 핵심 </a:t>
             </a:r>
             <a:r>
-              <a:rPr lang="en-US" altLang="ko-KR" smtClean="0"/>
+              <a:rPr lang="en-US" altLang="ko-KR"/>
               <a:t>: </a:t>
             </a:r>
             <a:r>
-              <a:rPr lang="ko-KR" altLang="en-US" smtClean="0"/>
+              <a:rPr lang="ko-KR" altLang="en-US"/>
               <a:t>전쟁 상황에서 개개인의 입장에서 마주한 상황이 얼마나 사람들의 마음에 무언가를 던지는 지</a:t>
             </a:r>
             <a:r>
-              <a:rPr lang="en-US" altLang="ko-KR" smtClean="0"/>
+              <a:rPr lang="en-US" altLang="ko-KR"/>
               <a:t>.</a:t>
             </a:r>
             <a:endParaRPr lang="ko-KR" altLang="en-US"/>
@@ -4691,11 +5173,11 @@
           <a:lstStyle/>
           <a:p>
             <a:r>
-              <a:rPr lang="ko-KR" altLang="en-US" smtClean="0"/>
+              <a:rPr lang="ko-KR" altLang="en-US"/>
               <a:t>법칙</a:t>
             </a:r>
             <a:r>
-              <a:rPr lang="en-US" altLang="ko-KR" smtClean="0"/>
+              <a:rPr lang="en-US" altLang="ko-KR"/>
               <a:t>(?)</a:t>
             </a:r>
             <a:endParaRPr lang="ko-KR" altLang="en-US"/>
@@ -4723,40 +5205,39 @@
           <a:lstStyle/>
           <a:p>
             <a:r>
-              <a:rPr lang="en-US" altLang="ko-KR" smtClean="0"/>
+              <a:rPr lang="en-US" altLang="ko-KR"/>
               <a:t>FPS </a:t>
             </a:r>
             <a:r>
-              <a:rPr lang="ko-KR" altLang="en-US" smtClean="0"/>
+              <a:rPr lang="ko-KR" altLang="en-US"/>
               <a:t>게임 </a:t>
             </a:r>
             <a:r>
-              <a:rPr lang="en-US" altLang="ko-KR" smtClean="0"/>
+              <a:rPr lang="en-US" altLang="ko-KR"/>
               <a:t>: AK47</a:t>
             </a:r>
             <a:r>
-              <a:rPr lang="ko-KR" altLang="en-US" smtClean="0"/>
+              <a:rPr lang="ko-KR" altLang="en-US"/>
               <a:t>의 성능은 함부로 건드리면 안 된다</a:t>
             </a:r>
             <a:r>
-              <a:rPr lang="en-US" altLang="ko-KR" smtClean="0"/>
+              <a:rPr lang="en-US" altLang="ko-KR"/>
               <a:t>.</a:t>
             </a:r>
           </a:p>
           <a:p>
             <a:r>
-              <a:rPr lang="ko-KR" altLang="en-US" smtClean="0"/>
+              <a:rPr lang="ko-KR" altLang="en-US"/>
               <a:t>삼국지 게임 </a:t>
             </a:r>
             <a:r>
-              <a:rPr lang="en-US" altLang="ko-KR" smtClean="0"/>
+              <a:rPr lang="en-US" altLang="ko-KR"/>
               <a:t>: </a:t>
             </a:r>
             <a:r>
-              <a:rPr lang="ko-KR" altLang="en-US" smtClean="0"/>
+              <a:rPr lang="ko-KR" altLang="en-US"/>
               <a:t>관우는 우리가 아는 관우에서 절대 벗어나면 안 됨</a:t>
             </a:r>
-            <a:endParaRPr lang="ko-KR" altLang="en-US"/>
           </a:p>
         </p:txBody>
       </p:sp>
@@ -4806,10 +5287,9 @@
           <a:lstStyle/>
           <a:p>
             <a:r>
-              <a:rPr lang="ko-KR" altLang="en-US" smtClean="0"/>
+              <a:rPr lang="ko-KR" altLang="en-US"/>
               <a:t>글쓰기</a:t>
             </a:r>
-            <a:endParaRPr lang="ko-KR" altLang="en-US"/>
           </a:p>
         </p:txBody>
       </p:sp>
@@ -4829,27 +5309,26 @@
           <a:lstStyle/>
           <a:p>
             <a:r>
-              <a:rPr lang="ko-KR" altLang="en-US" smtClean="0"/>
+              <a:rPr lang="ko-KR" altLang="en-US"/>
               <a:t>내가 가장 쓰기 싫은 글</a:t>
             </a:r>
-            <a:endParaRPr lang="en-US" altLang="ko-KR" smtClean="0"/>
-          </a:p>
-          <a:p>
-            <a:r>
-              <a:rPr lang="ko-KR" altLang="en-US" smtClean="0"/>
+            <a:endParaRPr lang="en-US" altLang="ko-KR"/>
+          </a:p>
+          <a:p>
+            <a:r>
+              <a:rPr lang="ko-KR" altLang="en-US"/>
               <a:t>내가 오글거려하는 글</a:t>
             </a:r>
-            <a:endParaRPr lang="en-US" altLang="ko-KR" smtClean="0"/>
-          </a:p>
-          <a:p>
             <a:endParaRPr lang="en-US" altLang="ko-KR"/>
           </a:p>
           <a:p>
-            <a:r>
-              <a:rPr lang="ko-KR" altLang="en-US" smtClean="0"/>
+            <a:endParaRPr lang="en-US" altLang="ko-KR"/>
+          </a:p>
+          <a:p>
+            <a:r>
+              <a:rPr lang="ko-KR" altLang="en-US"/>
               <a:t>그런 글을 써보면서 글쓰기 실력을 높여가자</a:t>
             </a:r>
-            <a:endParaRPr lang="ko-KR" altLang="en-US"/>
           </a:p>
         </p:txBody>
       </p:sp>
@@ -4899,10 +5378,9 @@
           <a:lstStyle/>
           <a:p>
             <a:r>
-              <a:rPr lang="ko-KR" altLang="en-US" smtClean="0"/>
+              <a:rPr lang="ko-KR" altLang="en-US"/>
               <a:t>중독</a:t>
             </a:r>
-            <a:endParaRPr lang="ko-KR" altLang="en-US"/>
           </a:p>
         </p:txBody>
       </p:sp>
@@ -4922,74 +5400,70 @@
           <a:lstStyle/>
           <a:p>
             <a:r>
-              <a:rPr lang="ko-KR" altLang="en-US" smtClean="0"/>
+              <a:rPr lang="ko-KR" altLang="en-US"/>
               <a:t>내가 게임에서 잘 키운 캐릭터를 보면서</a:t>
             </a:r>
-            <a:r>
-              <a:rPr lang="en-US" altLang="ko-KR" smtClean="0"/>
-              <a:t/>
-            </a:r>
             <a:br>
-              <a:rPr lang="en-US" altLang="ko-KR" smtClean="0"/>
+              <a:rPr lang="en-US" altLang="ko-KR"/>
             </a:br>
             <a:r>
-              <a:rPr lang="ko-KR" altLang="en-US" smtClean="0"/>
+              <a:rPr lang="ko-KR" altLang="en-US"/>
               <a:t>플레이어들은 </a:t>
             </a:r>
             <a:r>
-              <a:rPr lang="en-US" altLang="ko-KR" smtClean="0"/>
+              <a:rPr lang="en-US" altLang="ko-KR"/>
               <a:t>‘</a:t>
             </a:r>
             <a:r>
-              <a:rPr lang="ko-KR" altLang="en-US" smtClean="0"/>
+              <a:rPr lang="ko-KR" altLang="en-US"/>
               <a:t>성취감</a:t>
             </a:r>
             <a:r>
-              <a:rPr lang="en-US" altLang="ko-KR" smtClean="0"/>
+              <a:rPr lang="en-US" altLang="ko-KR"/>
               <a:t>＇</a:t>
             </a:r>
             <a:r>
-              <a:rPr lang="ko-KR" altLang="en-US" smtClean="0"/>
+              <a:rPr lang="ko-KR" altLang="en-US"/>
               <a:t>을 느낀다</a:t>
             </a:r>
             <a:r>
-              <a:rPr lang="en-US" altLang="ko-KR" smtClean="0"/>
+              <a:rPr lang="en-US" altLang="ko-KR"/>
               <a:t>.</a:t>
             </a:r>
           </a:p>
           <a:p>
             <a:r>
-              <a:rPr lang="ko-KR" altLang="en-US" smtClean="0"/>
+              <a:rPr lang="ko-KR" altLang="en-US"/>
               <a:t>인생에서 무언가를 이룬 것 같은 느낌</a:t>
             </a:r>
-            <a:endParaRPr lang="en-US" altLang="ko-KR" smtClean="0"/>
-          </a:p>
-          <a:p>
             <a:endParaRPr lang="en-US" altLang="ko-KR"/>
           </a:p>
           <a:p>
-            <a:r>
-              <a:rPr lang="ko-KR" altLang="en-US" smtClean="0"/>
+            <a:endParaRPr lang="en-US" altLang="ko-KR"/>
+          </a:p>
+          <a:p>
+            <a:r>
+              <a:rPr lang="ko-KR" altLang="en-US"/>
               <a:t>그러한 감정을 유저들이 느낄 수 있게</a:t>
             </a:r>
             <a:r>
-              <a:rPr lang="en-US" altLang="ko-KR" smtClean="0"/>
+              <a:rPr lang="en-US" altLang="ko-KR"/>
               <a:t>, </a:t>
             </a:r>
             <a:r>
-              <a:rPr lang="ko-KR" altLang="en-US" smtClean="0"/>
+              <a:rPr lang="ko-KR" altLang="en-US"/>
               <a:t>우리는 계기를</a:t>
             </a:r>
             <a:r>
-              <a:rPr lang="en-US" altLang="ko-KR" smtClean="0"/>
+              <a:rPr lang="en-US" altLang="ko-KR"/>
               <a:t>, </a:t>
             </a:r>
             <a:r>
-              <a:rPr lang="ko-KR" altLang="en-US" smtClean="0"/>
+              <a:rPr lang="ko-KR" altLang="en-US"/>
               <a:t>그 톱니바퀴를 만들어주는 역할</a:t>
             </a:r>
             <a:r>
-              <a:rPr lang="en-US" altLang="ko-KR" smtClean="0"/>
+              <a:rPr lang="en-US" altLang="ko-KR"/>
               <a:t>.</a:t>
             </a:r>
           </a:p>
@@ -4998,27 +5472,27 @@
           </a:p>
           <a:p>
             <a:r>
-              <a:rPr lang="ko-KR" altLang="en-US" smtClean="0"/>
+              <a:rPr lang="ko-KR" altLang="en-US"/>
               <a:t>게임에서의 </a:t>
             </a:r>
             <a:r>
-              <a:rPr lang="en-US" altLang="ko-KR" smtClean="0"/>
+              <a:rPr lang="en-US" altLang="ko-KR"/>
               <a:t>‘</a:t>
             </a:r>
             <a:r>
-              <a:rPr lang="ko-KR" altLang="en-US" smtClean="0"/>
+              <a:rPr lang="ko-KR" altLang="en-US"/>
               <a:t>스토리</a:t>
             </a:r>
             <a:r>
-              <a:rPr lang="en-US" altLang="ko-KR" smtClean="0"/>
+              <a:rPr lang="en-US" altLang="ko-KR"/>
               <a:t>’</a:t>
             </a:r>
             <a:r>
-              <a:rPr lang="ko-KR" altLang="en-US" smtClean="0"/>
+              <a:rPr lang="ko-KR" altLang="en-US"/>
               <a:t>는 작가와 개발진들이 유저에게 그런 감정을 느낄 수 있는 계기를 만들어주는 것</a:t>
             </a:r>
             <a:r>
-              <a:rPr lang="en-US" altLang="ko-KR" smtClean="0"/>
+              <a:rPr lang="en-US" altLang="ko-KR"/>
               <a:t>.</a:t>
             </a:r>
             <a:endParaRPr lang="ko-KR" altLang="en-US"/>
@@ -5090,57 +5564,53 @@
           <a:lstStyle/>
           <a:p>
             <a:r>
-              <a:rPr lang="ko-KR" altLang="en-US" smtClean="0"/>
+              <a:rPr lang="ko-KR" altLang="en-US"/>
               <a:t>이야기를 쓴다는 것</a:t>
             </a:r>
-            <a:r>
-              <a:rPr lang="en-US" altLang="ko-KR" smtClean="0"/>
-              <a:t/>
-            </a:r>
             <a:br>
-              <a:rPr lang="en-US" altLang="ko-KR" smtClean="0"/>
+              <a:rPr lang="en-US" altLang="ko-KR"/>
             </a:br>
             <a:r>
-              <a:rPr lang="en-US" altLang="ko-KR" smtClean="0"/>
+              <a:rPr lang="en-US" altLang="ko-KR"/>
               <a:t>= </a:t>
             </a:r>
             <a:r>
-              <a:rPr lang="ko-KR" altLang="en-US" smtClean="0"/>
+              <a:rPr lang="ko-KR" altLang="en-US"/>
               <a:t>유저들에게 자신들의 이야기를 만들어갈 기회를 주는 것</a:t>
             </a:r>
-            <a:endParaRPr lang="en-US" altLang="ko-KR" smtClean="0"/>
-          </a:p>
-          <a:p>
-            <a:r>
-              <a:rPr lang="ko-KR" altLang="en-US" smtClean="0"/>
+            <a:endParaRPr lang="en-US" altLang="ko-KR"/>
+          </a:p>
+          <a:p>
+            <a:r>
+              <a:rPr lang="ko-KR" altLang="en-US"/>
               <a:t>유저</a:t>
             </a:r>
             <a:r>
-              <a:rPr lang="en-US" altLang="ko-KR" smtClean="0"/>
+              <a:rPr lang="en-US" altLang="ko-KR"/>
               <a:t>-</a:t>
             </a:r>
             <a:r>
-              <a:rPr lang="ko-KR" altLang="en-US" smtClean="0"/>
+              <a:rPr lang="ko-KR" altLang="en-US"/>
               <a:t>유저 뿐 아니라</a:t>
             </a:r>
             <a:r>
-              <a:rPr lang="en-US" altLang="ko-KR" smtClean="0"/>
+              <a:rPr lang="en-US" altLang="ko-KR"/>
               <a:t>, </a:t>
             </a:r>
             <a:r>
-              <a:rPr lang="ko-KR" altLang="en-US" smtClean="0"/>
+              <a:rPr lang="ko-KR" altLang="en-US"/>
               <a:t>유저</a:t>
             </a:r>
             <a:r>
-              <a:rPr lang="en-US" altLang="ko-KR" smtClean="0"/>
+              <a:rPr lang="en-US" altLang="ko-KR"/>
               <a:t>-NPC </a:t>
             </a:r>
             <a:r>
-              <a:rPr lang="ko-KR" altLang="en-US" smtClean="0"/>
+              <a:rPr lang="ko-KR" altLang="en-US"/>
               <a:t>간의 관계에서 이야기를 만들어가기도 한다</a:t>
             </a:r>
             <a:r>
-              <a:rPr lang="en-US" altLang="ko-KR" smtClean="0"/>
+              <a:rPr lang="en-US" altLang="ko-KR"/>
               <a:t>.</a:t>
             </a:r>
             <a:endParaRPr lang="ko-KR" altLang="en-US"/>
@@ -5193,10 +5663,9 @@
           <a:lstStyle/>
           <a:p>
             <a:r>
-              <a:rPr lang="ko-KR" altLang="en-US" smtClean="0"/>
+              <a:rPr lang="ko-KR" altLang="en-US"/>
               <a:t>메타 휴먼</a:t>
             </a:r>
-            <a:endParaRPr lang="ko-KR" altLang="en-US"/>
           </a:p>
         </p:txBody>
       </p:sp>
@@ -5216,37 +5685,33 @@
           <a:lstStyle/>
           <a:p>
             <a:r>
-              <a:rPr lang="ko-KR" altLang="en-US" smtClean="0"/>
+              <a:rPr lang="ko-KR" altLang="en-US"/>
               <a:t>가상의 세계에서 인간같은 것</a:t>
             </a:r>
-            <a:endParaRPr lang="en-US" altLang="ko-KR" smtClean="0"/>
-          </a:p>
-          <a:p>
-            <a:r>
-              <a:rPr lang="ko-KR" altLang="en-US" smtClean="0"/>
+            <a:endParaRPr lang="en-US" altLang="ko-KR"/>
+          </a:p>
+          <a:p>
+            <a:r>
+              <a:rPr lang="ko-KR" altLang="en-US"/>
               <a:t>메타 휴먼에 </a:t>
             </a:r>
             <a:r>
-              <a:rPr lang="en-US" altLang="ko-KR" smtClean="0"/>
+              <a:rPr lang="en-US" altLang="ko-KR"/>
               <a:t>AI</a:t>
             </a:r>
             <a:r>
-              <a:rPr lang="ko-KR" altLang="en-US" smtClean="0"/>
+              <a:rPr lang="ko-KR" altLang="en-US"/>
               <a:t>를 넣어서 학습하도록 하면</a:t>
             </a:r>
-            <a:r>
-              <a:rPr lang="en-US" altLang="ko-KR" smtClean="0"/>
-              <a:t/>
-            </a:r>
             <a:br>
-              <a:rPr lang="en-US" altLang="ko-KR" smtClean="0"/>
+              <a:rPr lang="en-US" altLang="ko-KR"/>
             </a:br>
             <a:r>
-              <a:rPr lang="ko-KR" altLang="en-US" smtClean="0"/>
+              <a:rPr lang="ko-KR" altLang="en-US"/>
               <a:t>인간처럼 그 세계에서 살아갈 것이다</a:t>
             </a:r>
             <a:r>
-              <a:rPr lang="en-US" altLang="ko-KR" smtClean="0"/>
+              <a:rPr lang="en-US" altLang="ko-KR"/>
               <a:t>.</a:t>
             </a:r>
             <a:endParaRPr lang="ko-KR" altLang="en-US"/>
